--- a/ШАБЛОН.pptx
+++ b/ШАБЛОН.pptx
@@ -254,7 +254,7 @@
           <a:p>
             <a:fld id="{4AAD347D-5ACD-4C99-B74B-A9C85AD731AF}" type="datetimeFigureOut">
               <a:rPr lang="en-US" smtClean="0"/>
-              <a:t>4/7/2025</a:t>
+              <a:t>5/13/2025</a:t>
             </a:fld>
             <a:endParaRPr lang="en-US" dirty="0"/>
           </a:p>
@@ -424,7 +424,7 @@
           <a:p>
             <a:fld id="{4509A250-FF31-4206-8172-F9D3106AACB1}" type="datetimeFigureOut">
               <a:rPr lang="en-US" smtClean="0"/>
-              <a:t>4/7/2025</a:t>
+              <a:t>5/13/2025</a:t>
             </a:fld>
             <a:endParaRPr lang="en-US" dirty="0"/>
           </a:p>
@@ -604,7 +604,7 @@
           <a:p>
             <a:fld id="{4509A250-FF31-4206-8172-F9D3106AACB1}" type="datetimeFigureOut">
               <a:rPr lang="en-US" smtClean="0"/>
-              <a:t>4/7/2025</a:t>
+              <a:t>5/13/2025</a:t>
             </a:fld>
             <a:endParaRPr lang="en-US" dirty="0"/>
           </a:p>
@@ -774,7 +774,7 @@
           <a:p>
             <a:fld id="{9796027F-7875-4030-9381-8BD8C4F21935}" type="datetimeFigureOut">
               <a:rPr lang="en-US" smtClean="0"/>
-              <a:t>4/7/2025</a:t>
+              <a:t>5/13/2025</a:t>
             </a:fld>
             <a:endParaRPr lang="en-US" dirty="0"/>
           </a:p>
@@ -1018,7 +1018,7 @@
           <a:p>
             <a:fld id="{9796027F-7875-4030-9381-8BD8C4F21935}" type="datetimeFigureOut">
               <a:rPr lang="en-US" smtClean="0"/>
-              <a:t>4/7/2025</a:t>
+              <a:t>5/13/2025</a:t>
             </a:fld>
             <a:endParaRPr lang="en-US" dirty="0"/>
           </a:p>
@@ -1250,7 +1250,7 @@
           <a:p>
             <a:fld id="{9796027F-7875-4030-9381-8BD8C4F21935}" type="datetimeFigureOut">
               <a:rPr lang="en-US" smtClean="0"/>
-              <a:t>4/7/2025</a:t>
+              <a:t>5/13/2025</a:t>
             </a:fld>
             <a:endParaRPr lang="en-US" dirty="0"/>
           </a:p>
@@ -1617,7 +1617,7 @@
           <a:p>
             <a:fld id="{9796027F-7875-4030-9381-8BD8C4F21935}" type="datetimeFigureOut">
               <a:rPr lang="en-US" smtClean="0"/>
-              <a:t>4/7/2025</a:t>
+              <a:t>5/13/2025</a:t>
             </a:fld>
             <a:endParaRPr lang="en-US" dirty="0"/>
           </a:p>
@@ -1735,7 +1735,7 @@
           <a:p>
             <a:fld id="{4509A250-FF31-4206-8172-F9D3106AACB1}" type="datetimeFigureOut">
               <a:rPr lang="en-US" smtClean="0"/>
-              <a:t>4/7/2025</a:t>
+              <a:t>5/13/2025</a:t>
             </a:fld>
             <a:endParaRPr lang="en-US" dirty="0"/>
           </a:p>
@@ -1830,7 +1830,7 @@
           <a:p>
             <a:fld id="{4509A250-FF31-4206-8172-F9D3106AACB1}" type="datetimeFigureOut">
               <a:rPr lang="en-US" smtClean="0"/>
-              <a:t>4/7/2025</a:t>
+              <a:t>5/13/2025</a:t>
             </a:fld>
             <a:endParaRPr lang="en-US" dirty="0"/>
           </a:p>
@@ -2107,7 +2107,7 @@
           <a:p>
             <a:fld id="{4509A250-FF31-4206-8172-F9D3106AACB1}" type="datetimeFigureOut">
               <a:rPr lang="en-US" smtClean="0"/>
-              <a:t>4/7/2025</a:t>
+              <a:t>5/13/2025</a:t>
             </a:fld>
             <a:endParaRPr lang="en-US" dirty="0"/>
           </a:p>
@@ -2364,7 +2364,7 @@
           <a:p>
             <a:fld id="{4509A250-FF31-4206-8172-F9D3106AACB1}" type="datetimeFigureOut">
               <a:rPr lang="en-US" smtClean="0"/>
-              <a:t>4/7/2025</a:t>
+              <a:t>5/13/2025</a:t>
             </a:fld>
             <a:endParaRPr lang="en-US" dirty="0"/>
           </a:p>
@@ -2577,7 +2577,7 @@
           <a:p>
             <a:fld id="{4AAD347D-5ACD-4C99-B74B-A9C85AD731AF}" type="datetimeFigureOut">
               <a:rPr lang="en-US" smtClean="0"/>
-              <a:t>4/7/2025</a:t>
+              <a:t>5/13/2025</a:t>
             </a:fld>
             <a:endParaRPr lang="en-US" dirty="0"/>
           </a:p>
@@ -3051,7 +3051,7 @@
           <p:nvPr>
             <p:extLst>
               <p:ext uri="{D42A27DB-BD31-4B8C-83A1-F6EECF244321}">
-                <p14:modId xmlns:p14="http://schemas.microsoft.com/office/powerpoint/2010/main" val="2958888809"/>
+                <p14:modId xmlns:p14="http://schemas.microsoft.com/office/powerpoint/2010/main" val="236003140"/>
               </p:ext>
             </p:extLst>
           </p:nvPr>
@@ -3064,13 +3064,7 @@
           <a:graphicData uri="http://schemas.openxmlformats.org/drawingml/2006/table">
             <a:tbl>
               <a:tblPr firstRow="1" bandRow="1">
-                <a:effectLst>
-                  <a:outerShdw blurRad="63500" sx="102000" sy="102000" algn="ctr" rotWithShape="0">
-                    <a:prstClr val="black">
-                      <a:alpha val="40000"/>
-                    </a:prstClr>
-                  </a:outerShdw>
-                </a:effectLst>
+                <a:effectLst/>
                 <a:tableStyleId>{5C22544A-7EE6-4342-B048-85BDC9FD1C3A}</a:tableStyleId>
               </a:tblPr>
               <a:tblGrid>
@@ -6995,14 +6989,14 @@
           <p:nvPr>
             <p:extLst>
               <p:ext uri="{D42A27DB-BD31-4B8C-83A1-F6EECF244321}">
-                <p14:modId xmlns:p14="http://schemas.microsoft.com/office/powerpoint/2010/main" val="912714483"/>
+                <p14:modId xmlns:p14="http://schemas.microsoft.com/office/powerpoint/2010/main" val="159530175"/>
               </p:ext>
             </p:extLst>
           </p:nvPr>
         </p:nvGraphicFramePr>
         <p:xfrm>
-          <a:off x="950976" y="5789677"/>
-          <a:ext cx="5903970" cy="1774647"/>
+          <a:off x="950976" y="5789678"/>
+          <a:ext cx="5903968" cy="1774647"/>
         </p:xfrm>
         <a:graphic>
           <a:graphicData uri="http://schemas.openxmlformats.org/drawingml/2006/table">
@@ -7011,105 +7005,112 @@
                 <a:tableStyleId>{5C22544A-7EE6-4342-B048-85BDC9FD1C3A}</a:tableStyleId>
               </a:tblPr>
               <a:tblGrid>
-                <a:gridCol w="393598">
+                <a:gridCol w="368998">
                   <a:extLst>
                     <a:ext uri="{9D8B030D-6E8A-4147-A177-3AD203B41FA5}">
                       <a16:colId xmlns:a16="http://schemas.microsoft.com/office/drawing/2014/main" val="610431981"/>
                     </a:ext>
                   </a:extLst>
                 </a:gridCol>
-                <a:gridCol w="393598">
+                <a:gridCol w="368998">
                   <a:extLst>
                     <a:ext uri="{9D8B030D-6E8A-4147-A177-3AD203B41FA5}">
                       <a16:colId xmlns:a16="http://schemas.microsoft.com/office/drawing/2014/main" val="3537769183"/>
                     </a:ext>
                   </a:extLst>
                 </a:gridCol>
-                <a:gridCol w="393598">
+                <a:gridCol w="368998">
                   <a:extLst>
                     <a:ext uri="{9D8B030D-6E8A-4147-A177-3AD203B41FA5}">
                       <a16:colId xmlns:a16="http://schemas.microsoft.com/office/drawing/2014/main" val="2060737768"/>
                     </a:ext>
                   </a:extLst>
                 </a:gridCol>
-                <a:gridCol w="393598">
+                <a:gridCol w="368998">
                   <a:extLst>
                     <a:ext uri="{9D8B030D-6E8A-4147-A177-3AD203B41FA5}">
                       <a16:colId xmlns:a16="http://schemas.microsoft.com/office/drawing/2014/main" val="338597175"/>
                     </a:ext>
                   </a:extLst>
                 </a:gridCol>
-                <a:gridCol w="393598">
+                <a:gridCol w="368998">
                   <a:extLst>
                     <a:ext uri="{9D8B030D-6E8A-4147-A177-3AD203B41FA5}">
                       <a16:colId xmlns:a16="http://schemas.microsoft.com/office/drawing/2014/main" val="4277972712"/>
                     </a:ext>
                   </a:extLst>
                 </a:gridCol>
-                <a:gridCol w="393598">
+                <a:gridCol w="368998">
                   <a:extLst>
                     <a:ext uri="{9D8B030D-6E8A-4147-A177-3AD203B41FA5}">
                       <a16:colId xmlns:a16="http://schemas.microsoft.com/office/drawing/2014/main" val="1993788425"/>
                     </a:ext>
                   </a:extLst>
                 </a:gridCol>
-                <a:gridCol w="393598">
+                <a:gridCol w="368998">
                   <a:extLst>
                     <a:ext uri="{9D8B030D-6E8A-4147-A177-3AD203B41FA5}">
                       <a16:colId xmlns:a16="http://schemas.microsoft.com/office/drawing/2014/main" val="1983583148"/>
                     </a:ext>
                   </a:extLst>
                 </a:gridCol>
-                <a:gridCol w="393598">
+                <a:gridCol w="368998">
                   <a:extLst>
                     <a:ext uri="{9D8B030D-6E8A-4147-A177-3AD203B41FA5}">
                       <a16:colId xmlns:a16="http://schemas.microsoft.com/office/drawing/2014/main" val="4107795072"/>
                     </a:ext>
                   </a:extLst>
                 </a:gridCol>
-                <a:gridCol w="393598">
+                <a:gridCol w="368998">
                   <a:extLst>
                     <a:ext uri="{9D8B030D-6E8A-4147-A177-3AD203B41FA5}">
                       <a16:colId xmlns:a16="http://schemas.microsoft.com/office/drawing/2014/main" val="3691972538"/>
                     </a:ext>
                   </a:extLst>
                 </a:gridCol>
-                <a:gridCol w="393598">
+                <a:gridCol w="368998">
                   <a:extLst>
                     <a:ext uri="{9D8B030D-6E8A-4147-A177-3AD203B41FA5}">
                       <a16:colId xmlns:a16="http://schemas.microsoft.com/office/drawing/2014/main" val="1165416398"/>
                     </a:ext>
                   </a:extLst>
                 </a:gridCol>
-                <a:gridCol w="393598">
+                <a:gridCol w="368998">
                   <a:extLst>
                     <a:ext uri="{9D8B030D-6E8A-4147-A177-3AD203B41FA5}">
                       <a16:colId xmlns:a16="http://schemas.microsoft.com/office/drawing/2014/main" val="3127433988"/>
                     </a:ext>
                   </a:extLst>
                 </a:gridCol>
-                <a:gridCol w="393598">
+                <a:gridCol w="368998">
                   <a:extLst>
                     <a:ext uri="{9D8B030D-6E8A-4147-A177-3AD203B41FA5}">
                       <a16:colId xmlns:a16="http://schemas.microsoft.com/office/drawing/2014/main" val="1636613958"/>
                     </a:ext>
                   </a:extLst>
                 </a:gridCol>
-                <a:gridCol w="393598">
+                <a:gridCol w="368998">
+                  <a:extLst>
+                    <a:ext uri="{9D8B030D-6E8A-4147-A177-3AD203B41FA5}">
+                      <a16:colId xmlns:a16="http://schemas.microsoft.com/office/drawing/2014/main" val="1004398979"/>
+                    </a:ext>
+                  </a:extLst>
+                </a:gridCol>
+                <a:gridCol w="368998">
                   <a:extLst>
                     <a:ext uri="{9D8B030D-6E8A-4147-A177-3AD203B41FA5}">
                       <a16:colId xmlns:a16="http://schemas.microsoft.com/office/drawing/2014/main" val="4136922754"/>
                     </a:ext>
                   </a:extLst>
                 </a:gridCol>
-                <a:gridCol w="393598">
+                <a:gridCol w="368998">
                   <a:extLst>
                     <a:ext uri="{9D8B030D-6E8A-4147-A177-3AD203B41FA5}">
                       <a16:colId xmlns:a16="http://schemas.microsoft.com/office/drawing/2014/main" val="374277967"/>
                     </a:ext>
                   </a:extLst>
                 </a:gridCol>
-                <a:gridCol w="393598">
+                <a:gridCol w="368998">
                   <a:extLst>
                     <a:ext uri="{9D8B030D-6E8A-4147-A177-3AD203B41FA5}">
                       <a16:colId xmlns:a16="http://schemas.microsoft.com/office/drawing/2014/main" val="2061718540"/>
@@ -7117,8 +7118,8 @@
                   </a:extLst>
                 </a:gridCol>
               </a:tblGrid>
-              <a:tr h="236194">
-                <a:tc gridSpan="15">
+              <a:tr h="262620">
+                <a:tc gridSpan="16">
                   <a:txBody>
                     <a:bodyPr/>
                     <a:lstStyle/>
@@ -7297,6 +7298,16 @@
                     <a:bodyPr/>
                     <a:lstStyle/>
                     <a:p>
+                      <a:endParaRPr lang="ru-RU"/>
+                    </a:p>
+                  </a:txBody>
+                  <a:tcPr/>
+                </a:tc>
+                <a:tc hMerge="1">
+                  <a:txBody>
+                    <a:bodyPr/>
+                    <a:lstStyle/>
+                    <a:p>
                       <a:endParaRPr lang="ru-RU" dirty="0"/>
                     </a:p>
                   </a:txBody>
@@ -7328,8 +7339,8 @@
                   </a:ext>
                 </a:extLst>
               </a:tr>
-              <a:tr h="1145308">
-                <a:tc>
+              <a:tr h="678027">
+                <a:tc rowSpan="2">
                   <a:txBody>
                     <a:bodyPr/>
                     <a:lstStyle/>
@@ -7393,7 +7404,7 @@
                     <a:noFill/>
                   </a:tcPr>
                 </a:tc>
-                <a:tc>
+                <a:tc rowSpan="2">
                   <a:txBody>
                     <a:bodyPr/>
                     <a:lstStyle/>
@@ -7457,7 +7468,7 @@
                     <a:noFill/>
                   </a:tcPr>
                 </a:tc>
-                <a:tc>
+                <a:tc rowSpan="2">
                   <a:txBody>
                     <a:bodyPr/>
                     <a:lstStyle/>
@@ -7521,7 +7532,7 @@
                     <a:noFill/>
                   </a:tcPr>
                 </a:tc>
-                <a:tc>
+                <a:tc rowSpan="2">
                   <a:txBody>
                     <a:bodyPr/>
                     <a:lstStyle/>
@@ -7585,7 +7596,7 @@
                     <a:noFill/>
                   </a:tcPr>
                 </a:tc>
-                <a:tc>
+                <a:tc rowSpan="2">
                   <a:txBody>
                     <a:bodyPr/>
                     <a:lstStyle/>
@@ -7649,7 +7660,7 @@
                     <a:noFill/>
                   </a:tcPr>
                 </a:tc>
-                <a:tc>
+                <a:tc rowSpan="2">
                   <a:txBody>
                     <a:bodyPr/>
                     <a:lstStyle/>
@@ -7713,7 +7724,7 @@
                     <a:noFill/>
                   </a:tcPr>
                 </a:tc>
-                <a:tc>
+                <a:tc rowSpan="2">
                   <a:txBody>
                     <a:bodyPr/>
                     <a:lstStyle/>
@@ -7777,7 +7788,7 @@
                     <a:noFill/>
                   </a:tcPr>
                 </a:tc>
-                <a:tc>
+                <a:tc rowSpan="2">
                   <a:txBody>
                     <a:bodyPr/>
                     <a:lstStyle/>
@@ -7841,7 +7852,7 @@
                     <a:noFill/>
                   </a:tcPr>
                 </a:tc>
-                <a:tc>
+                <a:tc rowSpan="2">
                   <a:txBody>
                     <a:bodyPr/>
                     <a:lstStyle/>
@@ -7905,7 +7916,7 @@
                     <a:noFill/>
                   </a:tcPr>
                 </a:tc>
-                <a:tc>
+                <a:tc rowSpan="2">
                   <a:txBody>
                     <a:bodyPr/>
                     <a:lstStyle/>
@@ -7969,7 +7980,7 @@
                     <a:noFill/>
                   </a:tcPr>
                 </a:tc>
-                <a:tc>
+                <a:tc rowSpan="2">
                   <a:txBody>
                     <a:bodyPr/>
                     <a:lstStyle/>
@@ -8033,7 +8044,7 @@
                     <a:noFill/>
                   </a:tcPr>
                 </a:tc>
-                <a:tc>
+                <a:tc gridSpan="2">
                   <a:txBody>
                     <a:bodyPr/>
                     <a:lstStyle/>
@@ -8057,6 +8068,67 @@
                       </a:r>
                     </a:p>
                   </a:txBody>
+                  <a:tcPr marL="9525" marR="9525" marT="9525" marB="0" anchor="ctr">
+                    <a:lnL w="12700" cap="flat" cmpd="sng" algn="ctr">
+                      <a:solidFill>
+                        <a:schemeClr val="tx1"/>
+                      </a:solidFill>
+                      <a:prstDash val="solid"/>
+                      <a:round/>
+                      <a:headEnd type="none" w="med" len="med"/>
+                      <a:tailEnd type="none" w="med" len="med"/>
+                    </a:lnL>
+                    <a:lnR w="12700" cap="flat" cmpd="sng" algn="ctr">
+                      <a:solidFill>
+                        <a:schemeClr val="tx1"/>
+                      </a:solidFill>
+                      <a:prstDash val="solid"/>
+                      <a:round/>
+                      <a:headEnd type="none" w="med" len="med"/>
+                      <a:tailEnd type="none" w="med" len="med"/>
+                    </a:lnR>
+                    <a:lnT w="12700" cap="flat" cmpd="sng" algn="ctr">
+                      <a:solidFill>
+                        <a:schemeClr val="tx1"/>
+                      </a:solidFill>
+                      <a:prstDash val="solid"/>
+                      <a:round/>
+                      <a:headEnd type="none" w="med" len="med"/>
+                      <a:tailEnd type="none" w="med" len="med"/>
+                    </a:lnT>
+                    <a:lnB w="12700" cap="flat" cmpd="sng" algn="ctr">
+                      <a:solidFill>
+                        <a:schemeClr val="tx1"/>
+                      </a:solidFill>
+                      <a:prstDash val="solid"/>
+                      <a:round/>
+                      <a:headEnd type="none" w="med" len="med"/>
+                      <a:tailEnd type="none" w="med" len="med"/>
+                    </a:lnB>
+                    <a:noFill/>
+                  </a:tcPr>
+                </a:tc>
+                <a:tc hMerge="1">
+                  <a:txBody>
+                    <a:bodyPr/>
+                    <a:lstStyle/>
+                    <a:p>
+                      <a:pPr algn="ctr" fontAlgn="ctr"/>
+                      <a:endParaRPr lang="ru-RU" sz="1000" b="1" i="1" u="none" strike="noStrike" dirty="0">
+                        <a:solidFill>
+                          <a:schemeClr val="tx1"/>
+                        </a:solidFill>
+                        <a:effectLst>
+                          <a:outerShdw blurRad="38100" dist="38100" dir="2700000" algn="tl">
+                            <a:srgbClr val="000000">
+                              <a:alpha val="43137"/>
+                            </a:srgbClr>
+                          </a:outerShdw>
+                        </a:effectLst>
+                        <a:latin typeface="Times New Roman" panose="02020603050405020304" pitchFamily="18" charset="0"/>
+                      </a:endParaRPr>
+                    </a:p>
+                  </a:txBody>
                   <a:tcPr marL="9525" marR="9525" marT="9525" marB="0" vert="vert270" anchor="ctr">
                     <a:lnL w="12700" cap="flat" cmpd="sng" algn="ctr">
                       <a:solidFill>
@@ -8097,7 +8169,7 @@
                     <a:noFill/>
                   </a:tcPr>
                 </a:tc>
-                <a:tc>
+                <a:tc rowSpan="2">
                   <a:txBody>
                     <a:bodyPr/>
                     <a:lstStyle/>
@@ -8161,7 +8233,7 @@
                     <a:noFill/>
                   </a:tcPr>
                 </a:tc>
-                <a:tc>
+                <a:tc rowSpan="2">
                   <a:txBody>
                     <a:bodyPr/>
                     <a:lstStyle/>
@@ -8225,7 +8297,7 @@
                     <a:noFill/>
                   </a:tcPr>
                 </a:tc>
-                <a:tc>
+                <a:tc rowSpan="2">
                   <a:txBody>
                     <a:bodyPr/>
                     <a:lstStyle/>
@@ -8295,7 +8367,282 @@
                   </a:ext>
                 </a:extLst>
               </a:tr>
-              <a:tr h="370259">
+              <a:tr h="506509">
+                <a:tc vMerge="1">
+                  <a:txBody>
+                    <a:bodyPr/>
+                    <a:lstStyle/>
+                    <a:p>
+                      <a:endParaRPr lang="ru-RU"/>
+                    </a:p>
+                  </a:txBody>
+                  <a:tcPr/>
+                </a:tc>
+                <a:tc vMerge="1">
+                  <a:txBody>
+                    <a:bodyPr/>
+                    <a:lstStyle/>
+                    <a:p>
+                      <a:endParaRPr lang="ru-RU"/>
+                    </a:p>
+                  </a:txBody>
+                  <a:tcPr/>
+                </a:tc>
+                <a:tc vMerge="1">
+                  <a:txBody>
+                    <a:bodyPr/>
+                    <a:lstStyle/>
+                    <a:p>
+                      <a:endParaRPr lang="ru-RU"/>
+                    </a:p>
+                  </a:txBody>
+                  <a:tcPr/>
+                </a:tc>
+                <a:tc vMerge="1">
+                  <a:txBody>
+                    <a:bodyPr/>
+                    <a:lstStyle/>
+                    <a:p>
+                      <a:endParaRPr lang="ru-RU"/>
+                    </a:p>
+                  </a:txBody>
+                  <a:tcPr/>
+                </a:tc>
+                <a:tc vMerge="1">
+                  <a:txBody>
+                    <a:bodyPr/>
+                    <a:lstStyle/>
+                    <a:p>
+                      <a:endParaRPr lang="ru-RU"/>
+                    </a:p>
+                  </a:txBody>
+                  <a:tcPr/>
+                </a:tc>
+                <a:tc vMerge="1">
+                  <a:txBody>
+                    <a:bodyPr/>
+                    <a:lstStyle/>
+                    <a:p>
+                      <a:endParaRPr lang="ru-RU"/>
+                    </a:p>
+                  </a:txBody>
+                  <a:tcPr/>
+                </a:tc>
+                <a:tc vMerge="1">
+                  <a:txBody>
+                    <a:bodyPr/>
+                    <a:lstStyle/>
+                    <a:p>
+                      <a:endParaRPr lang="ru-RU"/>
+                    </a:p>
+                  </a:txBody>
+                  <a:tcPr/>
+                </a:tc>
+                <a:tc vMerge="1">
+                  <a:txBody>
+                    <a:bodyPr/>
+                    <a:lstStyle/>
+                    <a:p>
+                      <a:endParaRPr lang="ru-RU"/>
+                    </a:p>
+                  </a:txBody>
+                  <a:tcPr/>
+                </a:tc>
+                <a:tc vMerge="1">
+                  <a:txBody>
+                    <a:bodyPr/>
+                    <a:lstStyle/>
+                    <a:p>
+                      <a:endParaRPr lang="ru-RU"/>
+                    </a:p>
+                  </a:txBody>
+                  <a:tcPr/>
+                </a:tc>
+                <a:tc vMerge="1">
+                  <a:txBody>
+                    <a:bodyPr/>
+                    <a:lstStyle/>
+                    <a:p>
+                      <a:endParaRPr lang="ru-RU"/>
+                    </a:p>
+                  </a:txBody>
+                  <a:tcPr/>
+                </a:tc>
+                <a:tc vMerge="1">
+                  <a:txBody>
+                    <a:bodyPr/>
+                    <a:lstStyle/>
+                    <a:p>
+                      <a:endParaRPr lang="ru-RU"/>
+                    </a:p>
+                  </a:txBody>
+                  <a:tcPr/>
+                </a:tc>
+                <a:tc>
+                  <a:txBody>
+                    <a:bodyPr/>
+                    <a:lstStyle/>
+                    <a:p>
+                      <a:pPr algn="ctr" fontAlgn="ctr"/>
+                      <a:r>
+                        <a:rPr lang="ru-RU" sz="1000" b="1" i="1" u="none" strike="noStrike" dirty="0">
+                          <a:solidFill>
+                            <a:schemeClr val="tx1"/>
+                          </a:solidFill>
+                          <a:effectLst>
+                            <a:outerShdw blurRad="38100" dist="38100" dir="2700000" algn="tl">
+                              <a:srgbClr val="000000">
+                                <a:alpha val="43137"/>
+                              </a:srgbClr>
+                            </a:outerShdw>
+                          </a:effectLst>
+                          <a:latin typeface="Times New Roman" panose="02020603050405020304" pitchFamily="18" charset="0"/>
+                        </a:rPr>
+                        <a:t>подтёк</a:t>
+                      </a:r>
+                    </a:p>
+                  </a:txBody>
+                  <a:tcPr marL="9525" marR="9525" marT="9525" marB="0" vert="vert270" anchor="ctr">
+                    <a:lnL w="12700" cap="flat" cmpd="sng" algn="ctr">
+                      <a:solidFill>
+                        <a:schemeClr val="tx1"/>
+                      </a:solidFill>
+                      <a:prstDash val="solid"/>
+                      <a:round/>
+                      <a:headEnd type="none" w="med" len="med"/>
+                      <a:tailEnd type="none" w="med" len="med"/>
+                    </a:lnL>
+                    <a:lnR w="12700" cap="flat" cmpd="sng" algn="ctr">
+                      <a:solidFill>
+                        <a:schemeClr val="tx1"/>
+                      </a:solidFill>
+                      <a:prstDash val="solid"/>
+                      <a:round/>
+                      <a:headEnd type="none" w="med" len="med"/>
+                      <a:tailEnd type="none" w="med" len="med"/>
+                    </a:lnR>
+                    <a:lnT w="12700" cap="flat" cmpd="sng" algn="ctr">
+                      <a:solidFill>
+                        <a:schemeClr val="tx1"/>
+                      </a:solidFill>
+                      <a:prstDash val="solid"/>
+                      <a:round/>
+                      <a:headEnd type="none" w="med" len="med"/>
+                      <a:tailEnd type="none" w="med" len="med"/>
+                    </a:lnT>
+                    <a:lnB w="12700" cap="flat" cmpd="sng" algn="ctr">
+                      <a:solidFill>
+                        <a:schemeClr val="tx1"/>
+                      </a:solidFill>
+                      <a:prstDash val="solid"/>
+                      <a:round/>
+                      <a:headEnd type="none" w="med" len="med"/>
+                      <a:tailEnd type="none" w="med" len="med"/>
+                    </a:lnB>
+                    <a:noFill/>
+                  </a:tcPr>
+                </a:tc>
+                <a:tc>
+                  <a:txBody>
+                    <a:bodyPr/>
+                    <a:lstStyle/>
+                    <a:p>
+                      <a:pPr algn="ctr" fontAlgn="ctr"/>
+                      <a:r>
+                        <a:rPr lang="ru-RU" sz="1000" b="1" i="1" u="none" strike="noStrike" dirty="0">
+                          <a:solidFill>
+                            <a:schemeClr val="tx1"/>
+                          </a:solidFill>
+                          <a:effectLst>
+                            <a:outerShdw blurRad="38100" dist="38100" dir="2700000" algn="tl">
+                              <a:srgbClr val="000000">
+                                <a:alpha val="43137"/>
+                              </a:srgbClr>
+                            </a:outerShdw>
+                          </a:effectLst>
+                          <a:latin typeface="Times New Roman" panose="02020603050405020304" pitchFamily="18" charset="0"/>
+                        </a:rPr>
+                        <a:t>по шву</a:t>
+                      </a:r>
+                    </a:p>
+                  </a:txBody>
+                  <a:tcPr marL="9525" marR="9525" marT="9525" marB="0" vert="vert270" anchor="ctr">
+                    <a:lnL w="12700" cap="flat" cmpd="sng" algn="ctr">
+                      <a:solidFill>
+                        <a:schemeClr val="tx1"/>
+                      </a:solidFill>
+                      <a:prstDash val="solid"/>
+                      <a:round/>
+                      <a:headEnd type="none" w="med" len="med"/>
+                      <a:tailEnd type="none" w="med" len="med"/>
+                    </a:lnL>
+                    <a:lnR w="12700" cap="flat" cmpd="sng" algn="ctr">
+                      <a:solidFill>
+                        <a:schemeClr val="tx1"/>
+                      </a:solidFill>
+                      <a:prstDash val="solid"/>
+                      <a:round/>
+                      <a:headEnd type="none" w="med" len="med"/>
+                      <a:tailEnd type="none" w="med" len="med"/>
+                    </a:lnR>
+                    <a:lnT w="12700" cap="flat" cmpd="sng" algn="ctr">
+                      <a:solidFill>
+                        <a:schemeClr val="tx1"/>
+                      </a:solidFill>
+                      <a:prstDash val="solid"/>
+                      <a:round/>
+                      <a:headEnd type="none" w="med" len="med"/>
+                      <a:tailEnd type="none" w="med" len="med"/>
+                    </a:lnT>
+                    <a:lnB w="12700" cap="flat" cmpd="sng" algn="ctr">
+                      <a:solidFill>
+                        <a:schemeClr val="tx1"/>
+                      </a:solidFill>
+                      <a:prstDash val="solid"/>
+                      <a:round/>
+                      <a:headEnd type="none" w="med" len="med"/>
+                      <a:tailEnd type="none" w="med" len="med"/>
+                    </a:lnB>
+                    <a:noFill/>
+                  </a:tcPr>
+                </a:tc>
+                <a:tc vMerge="1">
+                  <a:txBody>
+                    <a:bodyPr/>
+                    <a:lstStyle/>
+                    <a:p>
+                      <a:endParaRPr lang="ru-RU"/>
+                    </a:p>
+                  </a:txBody>
+                  <a:tcPr/>
+                </a:tc>
+                <a:tc vMerge="1">
+                  <a:txBody>
+                    <a:bodyPr/>
+                    <a:lstStyle/>
+                    <a:p>
+                      <a:endParaRPr lang="ru-RU"/>
+                    </a:p>
+                  </a:txBody>
+                  <a:tcPr/>
+                </a:tc>
+                <a:tc vMerge="1">
+                  <a:txBody>
+                    <a:bodyPr/>
+                    <a:lstStyle/>
+                    <a:p>
+                      <a:endParaRPr lang="ru-RU"/>
+                    </a:p>
+                  </a:txBody>
+                  <a:tcPr/>
+                </a:tc>
+                <a:extLst>
+                  <a:ext uri="{0D108BD9-81ED-4DB2-BD59-A6C34878D82A}">
+                    <a16:rowId xmlns:a16="http://schemas.microsoft.com/office/drawing/2014/main" val="1165993419"/>
+                  </a:ext>
+                </a:extLst>
+              </a:tr>
+              <a:tr h="327491">
                 <a:tc>
                   <a:txBody>
                     <a:bodyPr/>
@@ -8973,7 +9320,68 @@
                     <a:lstStyle/>
                     <a:p>
                       <a:pPr algn="ctr"/>
-                      <a:endParaRPr lang="ru-RU" sz="1100" b="1">
+                      <a:endParaRPr lang="ru-RU" sz="1100" b="1" dirty="0">
+                        <a:solidFill>
+                          <a:schemeClr val="tx1"/>
+                        </a:solidFill>
+                        <a:effectLst>
+                          <a:outerShdw blurRad="38100" dist="38100" dir="2700000" algn="tl">
+                            <a:srgbClr val="000000">
+                              <a:alpha val="43137"/>
+                            </a:srgbClr>
+                          </a:outerShdw>
+                        </a:effectLst>
+                        <a:latin typeface="Aptos Narrow" panose="020B0004020202020204" pitchFamily="34" charset="0"/>
+                      </a:endParaRPr>
+                    </a:p>
+                  </a:txBody>
+                  <a:tcPr>
+                    <a:lnL w="12700" cap="flat" cmpd="sng" algn="ctr">
+                      <a:solidFill>
+                        <a:schemeClr val="tx1"/>
+                      </a:solidFill>
+                      <a:prstDash val="solid"/>
+                      <a:round/>
+                      <a:headEnd type="none" w="med" len="med"/>
+                      <a:tailEnd type="none" w="med" len="med"/>
+                    </a:lnL>
+                    <a:lnR w="12700" cap="flat" cmpd="sng" algn="ctr">
+                      <a:solidFill>
+                        <a:schemeClr val="tx1"/>
+                      </a:solidFill>
+                      <a:prstDash val="solid"/>
+                      <a:round/>
+                      <a:headEnd type="none" w="med" len="med"/>
+                      <a:tailEnd type="none" w="med" len="med"/>
+                    </a:lnR>
+                    <a:lnT w="12700" cap="flat" cmpd="sng" algn="ctr">
+                      <a:solidFill>
+                        <a:schemeClr val="tx1"/>
+                      </a:solidFill>
+                      <a:prstDash val="solid"/>
+                      <a:round/>
+                      <a:headEnd type="none" w="med" len="med"/>
+                      <a:tailEnd type="none" w="med" len="med"/>
+                    </a:lnT>
+                    <a:lnB w="12700" cap="flat" cmpd="sng" algn="ctr">
+                      <a:solidFill>
+                        <a:schemeClr val="tx1"/>
+                      </a:solidFill>
+                      <a:prstDash val="solid"/>
+                      <a:round/>
+                      <a:headEnd type="none" w="med" len="med"/>
+                      <a:tailEnd type="none" w="med" len="med"/>
+                    </a:lnB>
+                    <a:noFill/>
+                  </a:tcPr>
+                </a:tc>
+                <a:tc>
+                  <a:txBody>
+                    <a:bodyPr/>
+                    <a:lstStyle/>
+                    <a:p>
+                      <a:pPr algn="ctr"/>
+                      <a:endParaRPr lang="ru-RU" sz="1100" b="1" dirty="0">
                         <a:solidFill>
                           <a:schemeClr val="tx1"/>
                         </a:solidFill>
@@ -9236,14 +9644,14 @@
           <p:nvPr>
             <p:extLst>
               <p:ext uri="{D42A27DB-BD31-4B8C-83A1-F6EECF244321}">
-                <p14:modId xmlns:p14="http://schemas.microsoft.com/office/powerpoint/2010/main" val="99230131"/>
+                <p14:modId xmlns:p14="http://schemas.microsoft.com/office/powerpoint/2010/main" val="3696860894"/>
               </p:ext>
             </p:extLst>
           </p:nvPr>
         </p:nvGraphicFramePr>
         <p:xfrm>
           <a:off x="0" y="7568338"/>
-          <a:ext cx="6858012" cy="1751761"/>
+          <a:ext cx="6858016" cy="1751762"/>
         </p:xfrm>
         <a:graphic>
           <a:graphicData uri="http://schemas.openxmlformats.org/drawingml/2006/table">
@@ -9252,147 +9660,154 @@
                 <a:tableStyleId>{5C22544A-7EE6-4342-B048-85BDC9FD1C3A}</a:tableStyleId>
               </a:tblPr>
               <a:tblGrid>
-                <a:gridCol w="326572">
+                <a:gridCol w="311728">
                   <a:extLst>
                     <a:ext uri="{9D8B030D-6E8A-4147-A177-3AD203B41FA5}">
                       <a16:colId xmlns:a16="http://schemas.microsoft.com/office/drawing/2014/main" val="655155884"/>
                     </a:ext>
                   </a:extLst>
                 </a:gridCol>
-                <a:gridCol w="326572">
+                <a:gridCol w="311728">
                   <a:extLst>
                     <a:ext uri="{9D8B030D-6E8A-4147-A177-3AD203B41FA5}">
                       <a16:colId xmlns:a16="http://schemas.microsoft.com/office/drawing/2014/main" val="142457269"/>
                     </a:ext>
                   </a:extLst>
                 </a:gridCol>
-                <a:gridCol w="326572">
+                <a:gridCol w="311728">
                   <a:extLst>
                     <a:ext uri="{9D8B030D-6E8A-4147-A177-3AD203B41FA5}">
                       <a16:colId xmlns:a16="http://schemas.microsoft.com/office/drawing/2014/main" val="1512520388"/>
                     </a:ext>
                   </a:extLst>
                 </a:gridCol>
-                <a:gridCol w="326572">
+                <a:gridCol w="311728">
                   <a:extLst>
                     <a:ext uri="{9D8B030D-6E8A-4147-A177-3AD203B41FA5}">
                       <a16:colId xmlns:a16="http://schemas.microsoft.com/office/drawing/2014/main" val="3435076607"/>
                     </a:ext>
                   </a:extLst>
                 </a:gridCol>
-                <a:gridCol w="326572">
+                <a:gridCol w="311728">
                   <a:extLst>
                     <a:ext uri="{9D8B030D-6E8A-4147-A177-3AD203B41FA5}">
                       <a16:colId xmlns:a16="http://schemas.microsoft.com/office/drawing/2014/main" val="1971822524"/>
                     </a:ext>
                   </a:extLst>
                 </a:gridCol>
-                <a:gridCol w="326572">
+                <a:gridCol w="311728">
                   <a:extLst>
                     <a:ext uri="{9D8B030D-6E8A-4147-A177-3AD203B41FA5}">
                       <a16:colId xmlns:a16="http://schemas.microsoft.com/office/drawing/2014/main" val="2673524797"/>
                     </a:ext>
                   </a:extLst>
                 </a:gridCol>
-                <a:gridCol w="326572">
+                <a:gridCol w="311728">
                   <a:extLst>
                     <a:ext uri="{9D8B030D-6E8A-4147-A177-3AD203B41FA5}">
                       <a16:colId xmlns:a16="http://schemas.microsoft.com/office/drawing/2014/main" val="1071996424"/>
                     </a:ext>
                   </a:extLst>
                 </a:gridCol>
-                <a:gridCol w="326572">
+                <a:gridCol w="311728">
                   <a:extLst>
                     <a:ext uri="{9D8B030D-6E8A-4147-A177-3AD203B41FA5}">
                       <a16:colId xmlns:a16="http://schemas.microsoft.com/office/drawing/2014/main" val="872006989"/>
                     </a:ext>
                   </a:extLst>
                 </a:gridCol>
-                <a:gridCol w="326572">
+                <a:gridCol w="311728">
                   <a:extLst>
                     <a:ext uri="{9D8B030D-6E8A-4147-A177-3AD203B41FA5}">
                       <a16:colId xmlns:a16="http://schemas.microsoft.com/office/drawing/2014/main" val="684132641"/>
                     </a:ext>
                   </a:extLst>
                 </a:gridCol>
-                <a:gridCol w="326572">
+                <a:gridCol w="311728">
                   <a:extLst>
                     <a:ext uri="{9D8B030D-6E8A-4147-A177-3AD203B41FA5}">
                       <a16:colId xmlns:a16="http://schemas.microsoft.com/office/drawing/2014/main" val="688398887"/>
                     </a:ext>
                   </a:extLst>
                 </a:gridCol>
-                <a:gridCol w="326572">
+                <a:gridCol w="311728">
                   <a:extLst>
                     <a:ext uri="{9D8B030D-6E8A-4147-A177-3AD203B41FA5}">
                       <a16:colId xmlns:a16="http://schemas.microsoft.com/office/drawing/2014/main" val="1146031796"/>
                     </a:ext>
                   </a:extLst>
                 </a:gridCol>
-                <a:gridCol w="326572">
+                <a:gridCol w="311728">
+                  <a:extLst>
+                    <a:ext uri="{9D8B030D-6E8A-4147-A177-3AD203B41FA5}">
+                      <a16:colId xmlns:a16="http://schemas.microsoft.com/office/drawing/2014/main" val="1375349407"/>
+                    </a:ext>
+                  </a:extLst>
+                </a:gridCol>
+                <a:gridCol w="311728">
                   <a:extLst>
                     <a:ext uri="{9D8B030D-6E8A-4147-A177-3AD203B41FA5}">
                       <a16:colId xmlns:a16="http://schemas.microsoft.com/office/drawing/2014/main" val="3636508242"/>
                     </a:ext>
                   </a:extLst>
                 </a:gridCol>
-                <a:gridCol w="326572">
+                <a:gridCol w="311728">
                   <a:extLst>
                     <a:ext uri="{9D8B030D-6E8A-4147-A177-3AD203B41FA5}">
                       <a16:colId xmlns:a16="http://schemas.microsoft.com/office/drawing/2014/main" val="1965016444"/>
                     </a:ext>
                   </a:extLst>
                 </a:gridCol>
-                <a:gridCol w="326572">
+                <a:gridCol w="311728">
                   <a:extLst>
                     <a:ext uri="{9D8B030D-6E8A-4147-A177-3AD203B41FA5}">
                       <a16:colId xmlns:a16="http://schemas.microsoft.com/office/drawing/2014/main" val="578221918"/>
                     </a:ext>
                   </a:extLst>
                 </a:gridCol>
-                <a:gridCol w="326572">
+                <a:gridCol w="311728">
                   <a:extLst>
                     <a:ext uri="{9D8B030D-6E8A-4147-A177-3AD203B41FA5}">
                       <a16:colId xmlns:a16="http://schemas.microsoft.com/office/drawing/2014/main" val="3286227942"/>
                     </a:ext>
                   </a:extLst>
                 </a:gridCol>
-                <a:gridCol w="326572">
+                <a:gridCol w="311728">
                   <a:extLst>
                     <a:ext uri="{9D8B030D-6E8A-4147-A177-3AD203B41FA5}">
                       <a16:colId xmlns:a16="http://schemas.microsoft.com/office/drawing/2014/main" val="3529732698"/>
                     </a:ext>
                   </a:extLst>
                 </a:gridCol>
-                <a:gridCol w="326572">
+                <a:gridCol w="311728">
                   <a:extLst>
                     <a:ext uri="{9D8B030D-6E8A-4147-A177-3AD203B41FA5}">
                       <a16:colId xmlns:a16="http://schemas.microsoft.com/office/drawing/2014/main" val="1093561990"/>
                     </a:ext>
                   </a:extLst>
                 </a:gridCol>
-                <a:gridCol w="326572">
+                <a:gridCol w="311728">
                   <a:extLst>
                     <a:ext uri="{9D8B030D-6E8A-4147-A177-3AD203B41FA5}">
                       <a16:colId xmlns:a16="http://schemas.microsoft.com/office/drawing/2014/main" val="293633382"/>
                     </a:ext>
                   </a:extLst>
                 </a:gridCol>
-                <a:gridCol w="326572">
+                <a:gridCol w="311728">
                   <a:extLst>
                     <a:ext uri="{9D8B030D-6E8A-4147-A177-3AD203B41FA5}">
                       <a16:colId xmlns:a16="http://schemas.microsoft.com/office/drawing/2014/main" val="3595429426"/>
                     </a:ext>
                   </a:extLst>
                 </a:gridCol>
-                <a:gridCol w="326572">
+                <a:gridCol w="311728">
                   <a:extLst>
                     <a:ext uri="{9D8B030D-6E8A-4147-A177-3AD203B41FA5}">
                       <a16:colId xmlns:a16="http://schemas.microsoft.com/office/drawing/2014/main" val="1036195196"/>
                     </a:ext>
                   </a:extLst>
                 </a:gridCol>
-                <a:gridCol w="326572">
+                <a:gridCol w="311728">
                   <a:extLst>
                     <a:ext uri="{9D8B030D-6E8A-4147-A177-3AD203B41FA5}">
                       <a16:colId xmlns:a16="http://schemas.microsoft.com/office/drawing/2014/main" val="3843341039"/>
@@ -9401,7 +9816,7 @@
                 </a:gridCol>
               </a:tblGrid>
               <a:tr h="212521">
-                <a:tc gridSpan="21">
+                <a:tc gridSpan="22">
                   <a:txBody>
                     <a:bodyPr/>
                     <a:lstStyle/>
@@ -9570,6 +9985,16 @@
                     <a:bodyPr/>
                     <a:lstStyle/>
                     <a:p>
+                      <a:endParaRPr lang="ru-RU"/>
+                    </a:p>
+                  </a:txBody>
+                  <a:tcPr/>
+                </a:tc>
+                <a:tc hMerge="1">
+                  <a:txBody>
+                    <a:bodyPr/>
+                    <a:lstStyle/>
+                    <a:p>
                       <a:endParaRPr lang="ru-RU" dirty="0"/>
                     </a:p>
                   </a:txBody>
@@ -9671,8 +10096,8 @@
                   </a:ext>
                 </a:extLst>
               </a:tr>
-              <a:tr h="1121841">
-                <a:tc>
+              <a:tr h="560921">
+                <a:tc rowSpan="2">
                   <a:txBody>
                     <a:bodyPr/>
                     <a:lstStyle/>
@@ -9736,7 +10161,7 @@
                     <a:noFill/>
                   </a:tcPr>
                 </a:tc>
-                <a:tc>
+                <a:tc rowSpan="2">
                   <a:txBody>
                     <a:bodyPr/>
                     <a:lstStyle/>
@@ -9800,7 +10225,7 @@
                     <a:noFill/>
                   </a:tcPr>
                 </a:tc>
-                <a:tc>
+                <a:tc rowSpan="2">
                   <a:txBody>
                     <a:bodyPr/>
                     <a:lstStyle/>
@@ -9864,7 +10289,7 @@
                     <a:noFill/>
                   </a:tcPr>
                 </a:tc>
-                <a:tc>
+                <a:tc rowSpan="2">
                   <a:txBody>
                     <a:bodyPr/>
                     <a:lstStyle/>
@@ -9928,7 +10353,7 @@
                     <a:noFill/>
                   </a:tcPr>
                 </a:tc>
-                <a:tc>
+                <a:tc rowSpan="2">
                   <a:txBody>
                     <a:bodyPr/>
                     <a:lstStyle/>
@@ -9992,7 +10417,7 @@
                     <a:noFill/>
                   </a:tcPr>
                 </a:tc>
-                <a:tc>
+                <a:tc rowSpan="2">
                   <a:txBody>
                     <a:bodyPr/>
                     <a:lstStyle/>
@@ -10056,7 +10481,7 @@
                     <a:noFill/>
                   </a:tcPr>
                 </a:tc>
-                <a:tc>
+                <a:tc rowSpan="2">
                   <a:txBody>
                     <a:bodyPr/>
                     <a:lstStyle/>
@@ -10120,7 +10545,7 @@
                     <a:noFill/>
                   </a:tcPr>
                 </a:tc>
-                <a:tc>
+                <a:tc rowSpan="2">
                   <a:txBody>
                     <a:bodyPr/>
                     <a:lstStyle/>
@@ -10184,7 +10609,7 @@
                     <a:noFill/>
                   </a:tcPr>
                 </a:tc>
-                <a:tc>
+                <a:tc rowSpan="2">
                   <a:txBody>
                     <a:bodyPr/>
                     <a:lstStyle/>
@@ -10248,7 +10673,7 @@
                     <a:noFill/>
                   </a:tcPr>
                 </a:tc>
-                <a:tc>
+                <a:tc rowSpan="2">
                   <a:txBody>
                     <a:bodyPr/>
                     <a:lstStyle/>
@@ -10312,7 +10737,7 @@
                     <a:noFill/>
                   </a:tcPr>
                 </a:tc>
-                <a:tc>
+                <a:tc gridSpan="2">
                   <a:txBody>
                     <a:bodyPr/>
                     <a:lstStyle/>
@@ -10336,6 +10761,67 @@
                       </a:r>
                     </a:p>
                   </a:txBody>
+                  <a:tcPr marL="9525" marR="9525" marT="9525" marB="0" anchor="ctr">
+                    <a:lnL w="12700" cap="flat" cmpd="sng" algn="ctr">
+                      <a:solidFill>
+                        <a:schemeClr val="tx1"/>
+                      </a:solidFill>
+                      <a:prstDash val="solid"/>
+                      <a:round/>
+                      <a:headEnd type="none" w="med" len="med"/>
+                      <a:tailEnd type="none" w="med" len="med"/>
+                    </a:lnL>
+                    <a:lnR w="12700" cap="flat" cmpd="sng" algn="ctr">
+                      <a:solidFill>
+                        <a:schemeClr val="tx1"/>
+                      </a:solidFill>
+                      <a:prstDash val="solid"/>
+                      <a:round/>
+                      <a:headEnd type="none" w="med" len="med"/>
+                      <a:tailEnd type="none" w="med" len="med"/>
+                    </a:lnR>
+                    <a:lnT w="12700" cap="flat" cmpd="sng" algn="ctr">
+                      <a:solidFill>
+                        <a:schemeClr val="tx1"/>
+                      </a:solidFill>
+                      <a:prstDash val="solid"/>
+                      <a:round/>
+                      <a:headEnd type="none" w="med" len="med"/>
+                      <a:tailEnd type="none" w="med" len="med"/>
+                    </a:lnT>
+                    <a:lnB w="12700" cap="flat" cmpd="sng" algn="ctr">
+                      <a:solidFill>
+                        <a:schemeClr val="tx1"/>
+                      </a:solidFill>
+                      <a:prstDash val="solid"/>
+                      <a:round/>
+                      <a:headEnd type="none" w="med" len="med"/>
+                      <a:tailEnd type="none" w="med" len="med"/>
+                    </a:lnB>
+                    <a:noFill/>
+                  </a:tcPr>
+                </a:tc>
+                <a:tc hMerge="1">
+                  <a:txBody>
+                    <a:bodyPr/>
+                    <a:lstStyle/>
+                    <a:p>
+                      <a:pPr algn="ctr" fontAlgn="ctr"/>
+                      <a:endParaRPr lang="ru-RU" sz="1000" b="1" i="1" u="none" strike="noStrike" dirty="0">
+                        <a:solidFill>
+                          <a:schemeClr val="tx1"/>
+                        </a:solidFill>
+                        <a:effectLst>
+                          <a:outerShdw blurRad="38100" dist="38100" dir="2700000" algn="tl">
+                            <a:srgbClr val="000000">
+                              <a:alpha val="43137"/>
+                            </a:srgbClr>
+                          </a:outerShdw>
+                        </a:effectLst>
+                        <a:latin typeface="Times New Roman" panose="02020603050405020304" pitchFamily="18" charset="0"/>
+                      </a:endParaRPr>
+                    </a:p>
+                  </a:txBody>
                   <a:tcPr marL="9525" marR="9525" marT="9525" marB="0" vert="vert270" anchor="ctr">
                     <a:lnL w="12700" cap="flat" cmpd="sng" algn="ctr">
                       <a:solidFill>
@@ -10376,7 +10862,7 @@
                     <a:noFill/>
                   </a:tcPr>
                 </a:tc>
-                <a:tc>
+                <a:tc rowSpan="2">
                   <a:txBody>
                     <a:bodyPr/>
                     <a:lstStyle/>
@@ -10440,7 +10926,7 @@
                     <a:noFill/>
                   </a:tcPr>
                 </a:tc>
-                <a:tc>
+                <a:tc rowSpan="2">
                   <a:txBody>
                     <a:bodyPr/>
                     <a:lstStyle/>
@@ -10504,7 +10990,7 @@
                     <a:noFill/>
                   </a:tcPr>
                 </a:tc>
-                <a:tc>
+                <a:tc rowSpan="2">
                   <a:txBody>
                     <a:bodyPr/>
                     <a:lstStyle/>
@@ -10581,7 +11067,7 @@
                     <a:noFill/>
                   </a:tcPr>
                 </a:tc>
-                <a:tc>
+                <a:tc rowSpan="2">
                   <a:txBody>
                     <a:bodyPr/>
                     <a:lstStyle/>
@@ -10645,7 +11131,7 @@
                     <a:noFill/>
                   </a:tcPr>
                 </a:tc>
-                <a:tc>
+                <a:tc rowSpan="2">
                   <a:txBody>
                     <a:bodyPr/>
                     <a:lstStyle/>
@@ -10709,7 +11195,7 @@
                     <a:noFill/>
                   </a:tcPr>
                 </a:tc>
-                <a:tc>
+                <a:tc rowSpan="2">
                   <a:txBody>
                     <a:bodyPr/>
                     <a:lstStyle/>
@@ -10773,7 +11259,7 @@
                     <a:noFill/>
                   </a:tcPr>
                 </a:tc>
-                <a:tc>
+                <a:tc rowSpan="2">
                   <a:txBody>
                     <a:bodyPr/>
                     <a:lstStyle/>
@@ -10837,7 +11323,7 @@
                     <a:noFill/>
                   </a:tcPr>
                 </a:tc>
-                <a:tc>
+                <a:tc rowSpan="2">
                   <a:txBody>
                     <a:bodyPr/>
                     <a:lstStyle/>
@@ -10901,7 +11387,7 @@
                     <a:noFill/>
                   </a:tcPr>
                 </a:tc>
-                <a:tc>
+                <a:tc rowSpan="2">
                   <a:txBody>
                     <a:bodyPr/>
                     <a:lstStyle/>
@@ -10978,7 +11464,7 @@
                     <a:noFill/>
                   </a:tcPr>
                 </a:tc>
-                <a:tc>
+                <a:tc rowSpan="2">
                   <a:txBody>
                     <a:bodyPr/>
                     <a:lstStyle/>
@@ -11048,6 +11534,341 @@
                   </a:ext>
                 </a:extLst>
               </a:tr>
+              <a:tr h="560921">
+                <a:tc vMerge="1">
+                  <a:txBody>
+                    <a:bodyPr/>
+                    <a:lstStyle/>
+                    <a:p>
+                      <a:endParaRPr lang="ru-RU"/>
+                    </a:p>
+                  </a:txBody>
+                  <a:tcPr/>
+                </a:tc>
+                <a:tc vMerge="1">
+                  <a:txBody>
+                    <a:bodyPr/>
+                    <a:lstStyle/>
+                    <a:p>
+                      <a:endParaRPr lang="ru-RU"/>
+                    </a:p>
+                  </a:txBody>
+                  <a:tcPr/>
+                </a:tc>
+                <a:tc vMerge="1">
+                  <a:txBody>
+                    <a:bodyPr/>
+                    <a:lstStyle/>
+                    <a:p>
+                      <a:endParaRPr lang="ru-RU"/>
+                    </a:p>
+                  </a:txBody>
+                  <a:tcPr/>
+                </a:tc>
+                <a:tc vMerge="1">
+                  <a:txBody>
+                    <a:bodyPr/>
+                    <a:lstStyle/>
+                    <a:p>
+                      <a:endParaRPr lang="ru-RU"/>
+                    </a:p>
+                  </a:txBody>
+                  <a:tcPr/>
+                </a:tc>
+                <a:tc vMerge="1">
+                  <a:txBody>
+                    <a:bodyPr/>
+                    <a:lstStyle/>
+                    <a:p>
+                      <a:endParaRPr lang="ru-RU"/>
+                    </a:p>
+                  </a:txBody>
+                  <a:tcPr/>
+                </a:tc>
+                <a:tc vMerge="1">
+                  <a:txBody>
+                    <a:bodyPr/>
+                    <a:lstStyle/>
+                    <a:p>
+                      <a:endParaRPr lang="ru-RU"/>
+                    </a:p>
+                  </a:txBody>
+                  <a:tcPr/>
+                </a:tc>
+                <a:tc vMerge="1">
+                  <a:txBody>
+                    <a:bodyPr/>
+                    <a:lstStyle/>
+                    <a:p>
+                      <a:endParaRPr lang="ru-RU"/>
+                    </a:p>
+                  </a:txBody>
+                  <a:tcPr/>
+                </a:tc>
+                <a:tc vMerge="1">
+                  <a:txBody>
+                    <a:bodyPr/>
+                    <a:lstStyle/>
+                    <a:p>
+                      <a:endParaRPr lang="ru-RU"/>
+                    </a:p>
+                  </a:txBody>
+                  <a:tcPr/>
+                </a:tc>
+                <a:tc vMerge="1">
+                  <a:txBody>
+                    <a:bodyPr/>
+                    <a:lstStyle/>
+                    <a:p>
+                      <a:endParaRPr lang="ru-RU"/>
+                    </a:p>
+                  </a:txBody>
+                  <a:tcPr/>
+                </a:tc>
+                <a:tc vMerge="1">
+                  <a:txBody>
+                    <a:bodyPr/>
+                    <a:lstStyle/>
+                    <a:p>
+                      <a:endParaRPr lang="ru-RU"/>
+                    </a:p>
+                  </a:txBody>
+                  <a:tcPr/>
+                </a:tc>
+                <a:tc>
+                  <a:txBody>
+                    <a:bodyPr/>
+                    <a:lstStyle/>
+                    <a:p>
+                      <a:pPr algn="ctr" fontAlgn="ctr"/>
+                      <a:r>
+                        <a:rPr lang="ru-RU" sz="1000" b="1" i="1" u="none" strike="noStrike" dirty="0">
+                          <a:solidFill>
+                            <a:schemeClr val="tx1"/>
+                          </a:solidFill>
+                          <a:effectLst>
+                            <a:outerShdw blurRad="38100" dist="38100" dir="2700000" algn="tl">
+                              <a:srgbClr val="000000">
+                                <a:alpha val="43137"/>
+                              </a:srgbClr>
+                            </a:outerShdw>
+                          </a:effectLst>
+                          <a:latin typeface="Times New Roman" panose="02020603050405020304" pitchFamily="18" charset="0"/>
+                        </a:rPr>
+                        <a:t>л</a:t>
+                      </a:r>
+                    </a:p>
+                  </a:txBody>
+                  <a:tcPr marL="9525" marR="9525" marT="9525" marB="0" anchor="ctr">
+                    <a:lnL w="12700" cap="flat" cmpd="sng" algn="ctr">
+                      <a:solidFill>
+                        <a:schemeClr val="tx1"/>
+                      </a:solidFill>
+                      <a:prstDash val="solid"/>
+                      <a:round/>
+                      <a:headEnd type="none" w="med" len="med"/>
+                      <a:tailEnd type="none" w="med" len="med"/>
+                    </a:lnL>
+                    <a:lnR w="12700" cap="flat" cmpd="sng" algn="ctr">
+                      <a:solidFill>
+                        <a:schemeClr val="tx1"/>
+                      </a:solidFill>
+                      <a:prstDash val="solid"/>
+                      <a:round/>
+                      <a:headEnd type="none" w="med" len="med"/>
+                      <a:tailEnd type="none" w="med" len="med"/>
+                    </a:lnR>
+                    <a:lnT w="12700" cap="flat" cmpd="sng" algn="ctr">
+                      <a:solidFill>
+                        <a:schemeClr val="tx1"/>
+                      </a:solidFill>
+                      <a:prstDash val="solid"/>
+                      <a:round/>
+                      <a:headEnd type="none" w="med" len="med"/>
+                      <a:tailEnd type="none" w="med" len="med"/>
+                    </a:lnT>
+                    <a:lnB w="12700" cap="flat" cmpd="sng" algn="ctr">
+                      <a:solidFill>
+                        <a:schemeClr val="tx1"/>
+                      </a:solidFill>
+                      <a:prstDash val="solid"/>
+                      <a:round/>
+                      <a:headEnd type="none" w="med" len="med"/>
+                      <a:tailEnd type="none" w="med" len="med"/>
+                    </a:lnB>
+                    <a:noFill/>
+                  </a:tcPr>
+                </a:tc>
+                <a:tc>
+                  <a:txBody>
+                    <a:bodyPr/>
+                    <a:lstStyle/>
+                    <a:p>
+                      <a:pPr algn="ctr" fontAlgn="ctr"/>
+                      <a:r>
+                        <a:rPr lang="ru-RU" sz="1000" b="1" i="1" u="none" strike="noStrike" dirty="0">
+                          <a:solidFill>
+                            <a:schemeClr val="tx1"/>
+                          </a:solidFill>
+                          <a:effectLst>
+                            <a:outerShdw blurRad="38100" dist="38100" dir="2700000" algn="tl">
+                              <a:srgbClr val="000000">
+                                <a:alpha val="43137"/>
+                              </a:srgbClr>
+                            </a:outerShdw>
+                          </a:effectLst>
+                          <a:latin typeface="Times New Roman" panose="02020603050405020304" pitchFamily="18" charset="0"/>
+                        </a:rPr>
+                        <a:t>п</a:t>
+                      </a:r>
+                    </a:p>
+                  </a:txBody>
+                  <a:tcPr marL="9525" marR="9525" marT="9525" marB="0" anchor="ctr">
+                    <a:lnL w="12700" cap="flat" cmpd="sng" algn="ctr">
+                      <a:solidFill>
+                        <a:schemeClr val="tx1"/>
+                      </a:solidFill>
+                      <a:prstDash val="solid"/>
+                      <a:round/>
+                      <a:headEnd type="none" w="med" len="med"/>
+                      <a:tailEnd type="none" w="med" len="med"/>
+                    </a:lnL>
+                    <a:lnR w="12700" cap="flat" cmpd="sng" algn="ctr">
+                      <a:solidFill>
+                        <a:schemeClr val="tx1"/>
+                      </a:solidFill>
+                      <a:prstDash val="solid"/>
+                      <a:round/>
+                      <a:headEnd type="none" w="med" len="med"/>
+                      <a:tailEnd type="none" w="med" len="med"/>
+                    </a:lnR>
+                    <a:lnT w="12700" cap="flat" cmpd="sng" algn="ctr">
+                      <a:solidFill>
+                        <a:schemeClr val="tx1"/>
+                      </a:solidFill>
+                      <a:prstDash val="solid"/>
+                      <a:round/>
+                      <a:headEnd type="none" w="med" len="med"/>
+                      <a:tailEnd type="none" w="med" len="med"/>
+                    </a:lnT>
+                    <a:lnB w="12700" cap="flat" cmpd="sng" algn="ctr">
+                      <a:solidFill>
+                        <a:schemeClr val="tx1"/>
+                      </a:solidFill>
+                      <a:prstDash val="solid"/>
+                      <a:round/>
+                      <a:headEnd type="none" w="med" len="med"/>
+                      <a:tailEnd type="none" w="med" len="med"/>
+                    </a:lnB>
+                    <a:noFill/>
+                  </a:tcPr>
+                </a:tc>
+                <a:tc vMerge="1">
+                  <a:txBody>
+                    <a:bodyPr/>
+                    <a:lstStyle/>
+                    <a:p>
+                      <a:endParaRPr lang="ru-RU"/>
+                    </a:p>
+                  </a:txBody>
+                  <a:tcPr/>
+                </a:tc>
+                <a:tc vMerge="1">
+                  <a:txBody>
+                    <a:bodyPr/>
+                    <a:lstStyle/>
+                    <a:p>
+                      <a:endParaRPr lang="ru-RU"/>
+                    </a:p>
+                  </a:txBody>
+                  <a:tcPr/>
+                </a:tc>
+                <a:tc vMerge="1">
+                  <a:txBody>
+                    <a:bodyPr/>
+                    <a:lstStyle/>
+                    <a:p>
+                      <a:endParaRPr lang="ru-RU"/>
+                    </a:p>
+                  </a:txBody>
+                  <a:tcPr/>
+                </a:tc>
+                <a:tc vMerge="1">
+                  <a:txBody>
+                    <a:bodyPr/>
+                    <a:lstStyle/>
+                    <a:p>
+                      <a:endParaRPr lang="ru-RU"/>
+                    </a:p>
+                  </a:txBody>
+                  <a:tcPr/>
+                </a:tc>
+                <a:tc vMerge="1">
+                  <a:txBody>
+                    <a:bodyPr/>
+                    <a:lstStyle/>
+                    <a:p>
+                      <a:endParaRPr lang="ru-RU"/>
+                    </a:p>
+                  </a:txBody>
+                  <a:tcPr/>
+                </a:tc>
+                <a:tc vMerge="1">
+                  <a:txBody>
+                    <a:bodyPr/>
+                    <a:lstStyle/>
+                    <a:p>
+                      <a:endParaRPr lang="ru-RU"/>
+                    </a:p>
+                  </a:txBody>
+                  <a:tcPr/>
+                </a:tc>
+                <a:tc vMerge="1">
+                  <a:txBody>
+                    <a:bodyPr/>
+                    <a:lstStyle/>
+                    <a:p>
+                      <a:endParaRPr lang="ru-RU"/>
+                    </a:p>
+                  </a:txBody>
+                  <a:tcPr/>
+                </a:tc>
+                <a:tc vMerge="1">
+                  <a:txBody>
+                    <a:bodyPr/>
+                    <a:lstStyle/>
+                    <a:p>
+                      <a:endParaRPr lang="ru-RU"/>
+                    </a:p>
+                  </a:txBody>
+                  <a:tcPr/>
+                </a:tc>
+                <a:tc vMerge="1">
+                  <a:txBody>
+                    <a:bodyPr/>
+                    <a:lstStyle/>
+                    <a:p>
+                      <a:endParaRPr lang="ru-RU"/>
+                    </a:p>
+                  </a:txBody>
+                  <a:tcPr/>
+                </a:tc>
+                <a:tc vMerge="1">
+                  <a:txBody>
+                    <a:bodyPr/>
+                    <a:lstStyle/>
+                    <a:p>
+                      <a:endParaRPr lang="ru-RU"/>
+                    </a:p>
+                  </a:txBody>
+                  <a:tcPr/>
+                </a:tc>
+                <a:extLst>
+                  <a:ext uri="{0D108BD9-81ED-4DB2-BD59-A6C34878D82A}">
+                    <a16:rowId xmlns:a16="http://schemas.microsoft.com/office/drawing/2014/main" val="1633346023"/>
+                  </a:ext>
+                </a:extLst>
+              </a:tr>
               <a:tr h="370840">
                 <a:tc>
                   <a:txBody>
@@ -11234,6 +12055,306 @@
                     <a:bodyPr/>
                     <a:lstStyle/>
                     <a:p>
+                      <a:endParaRPr lang="ru-RU" sz="1100" b="1" dirty="0">
+                        <a:solidFill>
+                          <a:schemeClr val="tx1"/>
+                        </a:solidFill>
+                        <a:effectLst>
+                          <a:outerShdw blurRad="38100" dist="38100" dir="2700000" algn="tl">
+                            <a:srgbClr val="000000">
+                              <a:alpha val="43137"/>
+                            </a:srgbClr>
+                          </a:outerShdw>
+                        </a:effectLst>
+                        <a:latin typeface="Aptos Display" panose="020B0004020202020204" pitchFamily="34" charset="0"/>
+                      </a:endParaRPr>
+                    </a:p>
+                  </a:txBody>
+                  <a:tcPr>
+                    <a:lnL w="12700" cap="flat" cmpd="sng" algn="ctr">
+                      <a:solidFill>
+                        <a:schemeClr val="tx1"/>
+                      </a:solidFill>
+                      <a:prstDash val="solid"/>
+                      <a:round/>
+                      <a:headEnd type="none" w="med" len="med"/>
+                      <a:tailEnd type="none" w="med" len="med"/>
+                    </a:lnL>
+                    <a:lnR w="12700" cap="flat" cmpd="sng" algn="ctr">
+                      <a:solidFill>
+                        <a:schemeClr val="tx1"/>
+                      </a:solidFill>
+                      <a:prstDash val="solid"/>
+                      <a:round/>
+                      <a:headEnd type="none" w="med" len="med"/>
+                      <a:tailEnd type="none" w="med" len="med"/>
+                    </a:lnR>
+                    <a:lnT w="12700" cap="flat" cmpd="sng" algn="ctr">
+                      <a:solidFill>
+                        <a:schemeClr val="tx1"/>
+                      </a:solidFill>
+                      <a:prstDash val="solid"/>
+                      <a:round/>
+                      <a:headEnd type="none" w="med" len="med"/>
+                      <a:tailEnd type="none" w="med" len="med"/>
+                    </a:lnT>
+                    <a:lnB w="12700" cap="flat" cmpd="sng" algn="ctr">
+                      <a:solidFill>
+                        <a:schemeClr val="tx1"/>
+                      </a:solidFill>
+                      <a:prstDash val="solid"/>
+                      <a:round/>
+                      <a:headEnd type="none" w="med" len="med"/>
+                      <a:tailEnd type="none" w="med" len="med"/>
+                    </a:lnB>
+                    <a:noFill/>
+                  </a:tcPr>
+                </a:tc>
+                <a:tc>
+                  <a:txBody>
+                    <a:bodyPr/>
+                    <a:lstStyle/>
+                    <a:p>
+                      <a:endParaRPr lang="ru-RU" sz="1100" b="1" dirty="0">
+                        <a:solidFill>
+                          <a:schemeClr val="tx1"/>
+                        </a:solidFill>
+                        <a:effectLst>
+                          <a:outerShdw blurRad="38100" dist="38100" dir="2700000" algn="tl">
+                            <a:srgbClr val="000000">
+                              <a:alpha val="43137"/>
+                            </a:srgbClr>
+                          </a:outerShdw>
+                        </a:effectLst>
+                        <a:latin typeface="Aptos Display" panose="020B0004020202020204" pitchFamily="34" charset="0"/>
+                      </a:endParaRPr>
+                    </a:p>
+                  </a:txBody>
+                  <a:tcPr>
+                    <a:lnL w="12700" cap="flat" cmpd="sng" algn="ctr">
+                      <a:solidFill>
+                        <a:schemeClr val="tx1"/>
+                      </a:solidFill>
+                      <a:prstDash val="solid"/>
+                      <a:round/>
+                      <a:headEnd type="none" w="med" len="med"/>
+                      <a:tailEnd type="none" w="med" len="med"/>
+                    </a:lnL>
+                    <a:lnR w="12700" cap="flat" cmpd="sng" algn="ctr">
+                      <a:solidFill>
+                        <a:schemeClr val="tx1"/>
+                      </a:solidFill>
+                      <a:prstDash val="solid"/>
+                      <a:round/>
+                      <a:headEnd type="none" w="med" len="med"/>
+                      <a:tailEnd type="none" w="med" len="med"/>
+                    </a:lnR>
+                    <a:lnT w="12700" cap="flat" cmpd="sng" algn="ctr">
+                      <a:solidFill>
+                        <a:schemeClr val="tx1"/>
+                      </a:solidFill>
+                      <a:prstDash val="solid"/>
+                      <a:round/>
+                      <a:headEnd type="none" w="med" len="med"/>
+                      <a:tailEnd type="none" w="med" len="med"/>
+                    </a:lnT>
+                    <a:lnB w="12700" cap="flat" cmpd="sng" algn="ctr">
+                      <a:solidFill>
+                        <a:schemeClr val="tx1"/>
+                      </a:solidFill>
+                      <a:prstDash val="solid"/>
+                      <a:round/>
+                      <a:headEnd type="none" w="med" len="med"/>
+                      <a:tailEnd type="none" w="med" len="med"/>
+                    </a:lnB>
+                    <a:noFill/>
+                  </a:tcPr>
+                </a:tc>
+                <a:tc>
+                  <a:txBody>
+                    <a:bodyPr/>
+                    <a:lstStyle/>
+                    <a:p>
+                      <a:endParaRPr lang="ru-RU" sz="1100" b="1" dirty="0">
+                        <a:solidFill>
+                          <a:schemeClr val="tx1"/>
+                        </a:solidFill>
+                        <a:effectLst>
+                          <a:outerShdw blurRad="38100" dist="38100" dir="2700000" algn="tl">
+                            <a:srgbClr val="000000">
+                              <a:alpha val="43137"/>
+                            </a:srgbClr>
+                          </a:outerShdw>
+                        </a:effectLst>
+                        <a:latin typeface="Aptos Display" panose="020B0004020202020204" pitchFamily="34" charset="0"/>
+                      </a:endParaRPr>
+                    </a:p>
+                  </a:txBody>
+                  <a:tcPr>
+                    <a:lnL w="12700" cap="flat" cmpd="sng" algn="ctr">
+                      <a:solidFill>
+                        <a:schemeClr val="tx1"/>
+                      </a:solidFill>
+                      <a:prstDash val="solid"/>
+                      <a:round/>
+                      <a:headEnd type="none" w="med" len="med"/>
+                      <a:tailEnd type="none" w="med" len="med"/>
+                    </a:lnL>
+                    <a:lnR w="12700" cap="flat" cmpd="sng" algn="ctr">
+                      <a:solidFill>
+                        <a:schemeClr val="tx1"/>
+                      </a:solidFill>
+                      <a:prstDash val="solid"/>
+                      <a:round/>
+                      <a:headEnd type="none" w="med" len="med"/>
+                      <a:tailEnd type="none" w="med" len="med"/>
+                    </a:lnR>
+                    <a:lnT w="12700" cap="flat" cmpd="sng" algn="ctr">
+                      <a:solidFill>
+                        <a:schemeClr val="tx1"/>
+                      </a:solidFill>
+                      <a:prstDash val="solid"/>
+                      <a:round/>
+                      <a:headEnd type="none" w="med" len="med"/>
+                      <a:tailEnd type="none" w="med" len="med"/>
+                    </a:lnT>
+                    <a:lnB w="12700" cap="flat" cmpd="sng" algn="ctr">
+                      <a:solidFill>
+                        <a:schemeClr val="tx1"/>
+                      </a:solidFill>
+                      <a:prstDash val="solid"/>
+                      <a:round/>
+                      <a:headEnd type="none" w="med" len="med"/>
+                      <a:tailEnd type="none" w="med" len="med"/>
+                    </a:lnB>
+                    <a:noFill/>
+                  </a:tcPr>
+                </a:tc>
+                <a:tc>
+                  <a:txBody>
+                    <a:bodyPr/>
+                    <a:lstStyle/>
+                    <a:p>
+                      <a:endParaRPr lang="ru-RU" sz="1100" b="1" dirty="0">
+                        <a:solidFill>
+                          <a:schemeClr val="tx1"/>
+                        </a:solidFill>
+                        <a:effectLst>
+                          <a:outerShdw blurRad="38100" dist="38100" dir="2700000" algn="tl">
+                            <a:srgbClr val="000000">
+                              <a:alpha val="43137"/>
+                            </a:srgbClr>
+                          </a:outerShdw>
+                        </a:effectLst>
+                        <a:latin typeface="Aptos Display" panose="020B0004020202020204" pitchFamily="34" charset="0"/>
+                      </a:endParaRPr>
+                    </a:p>
+                  </a:txBody>
+                  <a:tcPr>
+                    <a:lnL w="12700" cap="flat" cmpd="sng" algn="ctr">
+                      <a:solidFill>
+                        <a:schemeClr val="tx1"/>
+                      </a:solidFill>
+                      <a:prstDash val="solid"/>
+                      <a:round/>
+                      <a:headEnd type="none" w="med" len="med"/>
+                      <a:tailEnd type="none" w="med" len="med"/>
+                    </a:lnL>
+                    <a:lnR w="12700" cap="flat" cmpd="sng" algn="ctr">
+                      <a:solidFill>
+                        <a:schemeClr val="tx1"/>
+                      </a:solidFill>
+                      <a:prstDash val="solid"/>
+                      <a:round/>
+                      <a:headEnd type="none" w="med" len="med"/>
+                      <a:tailEnd type="none" w="med" len="med"/>
+                    </a:lnR>
+                    <a:lnT w="12700" cap="flat" cmpd="sng" algn="ctr">
+                      <a:solidFill>
+                        <a:schemeClr val="tx1"/>
+                      </a:solidFill>
+                      <a:prstDash val="solid"/>
+                      <a:round/>
+                      <a:headEnd type="none" w="med" len="med"/>
+                      <a:tailEnd type="none" w="med" len="med"/>
+                    </a:lnT>
+                    <a:lnB w="12700" cap="flat" cmpd="sng" algn="ctr">
+                      <a:solidFill>
+                        <a:schemeClr val="tx1"/>
+                      </a:solidFill>
+                      <a:prstDash val="solid"/>
+                      <a:round/>
+                      <a:headEnd type="none" w="med" len="med"/>
+                      <a:tailEnd type="none" w="med" len="med"/>
+                    </a:lnB>
+                    <a:noFill/>
+                  </a:tcPr>
+                </a:tc>
+                <a:tc>
+                  <a:txBody>
+                    <a:bodyPr/>
+                    <a:lstStyle/>
+                    <a:p>
+                      <a:endParaRPr lang="ru-RU" sz="1100" b="1" dirty="0">
+                        <a:solidFill>
+                          <a:schemeClr val="tx1"/>
+                        </a:solidFill>
+                        <a:effectLst>
+                          <a:outerShdw blurRad="38100" dist="38100" dir="2700000" algn="tl">
+                            <a:srgbClr val="000000">
+                              <a:alpha val="43137"/>
+                            </a:srgbClr>
+                          </a:outerShdw>
+                        </a:effectLst>
+                        <a:latin typeface="Aptos Display" panose="020B0004020202020204" pitchFamily="34" charset="0"/>
+                      </a:endParaRPr>
+                    </a:p>
+                  </a:txBody>
+                  <a:tcPr>
+                    <a:lnL w="12700" cap="flat" cmpd="sng" algn="ctr">
+                      <a:solidFill>
+                        <a:schemeClr val="tx1"/>
+                      </a:solidFill>
+                      <a:prstDash val="solid"/>
+                      <a:round/>
+                      <a:headEnd type="none" w="med" len="med"/>
+                      <a:tailEnd type="none" w="med" len="med"/>
+                    </a:lnL>
+                    <a:lnR w="12700" cap="flat" cmpd="sng" algn="ctr">
+                      <a:solidFill>
+                        <a:schemeClr val="tx1"/>
+                      </a:solidFill>
+                      <a:prstDash val="solid"/>
+                      <a:round/>
+                      <a:headEnd type="none" w="med" len="med"/>
+                      <a:tailEnd type="none" w="med" len="med"/>
+                    </a:lnR>
+                    <a:lnT w="12700" cap="flat" cmpd="sng" algn="ctr">
+                      <a:solidFill>
+                        <a:schemeClr val="tx1"/>
+                      </a:solidFill>
+                      <a:prstDash val="solid"/>
+                      <a:round/>
+                      <a:headEnd type="none" w="med" len="med"/>
+                      <a:tailEnd type="none" w="med" len="med"/>
+                    </a:lnT>
+                    <a:lnB w="12700" cap="flat" cmpd="sng" algn="ctr">
+                      <a:solidFill>
+                        <a:schemeClr val="tx1"/>
+                      </a:solidFill>
+                      <a:prstDash val="solid"/>
+                      <a:round/>
+                      <a:headEnd type="none" w="med" len="med"/>
+                      <a:tailEnd type="none" w="med" len="med"/>
+                    </a:lnB>
+                    <a:noFill/>
+                  </a:tcPr>
+                </a:tc>
+                <a:tc>
+                  <a:txBody>
+                    <a:bodyPr/>
+                    <a:lstStyle/>
+                    <a:p>
                       <a:endParaRPr lang="ru-RU" sz="1100" b="1">
                         <a:solidFill>
                           <a:schemeClr val="tx1"/>
@@ -11414,247 +12535,7 @@
                     <a:bodyPr/>
                     <a:lstStyle/>
                     <a:p>
-                      <a:endParaRPr lang="ru-RU" sz="1100" b="1">
-                        <a:solidFill>
-                          <a:schemeClr val="tx1"/>
-                        </a:solidFill>
-                        <a:effectLst>
-                          <a:outerShdw blurRad="38100" dist="38100" dir="2700000" algn="tl">
-                            <a:srgbClr val="000000">
-                              <a:alpha val="43137"/>
-                            </a:srgbClr>
-                          </a:outerShdw>
-                        </a:effectLst>
-                        <a:latin typeface="Aptos Display" panose="020B0004020202020204" pitchFamily="34" charset="0"/>
-                      </a:endParaRPr>
-                    </a:p>
-                  </a:txBody>
-                  <a:tcPr>
-                    <a:lnL w="12700" cap="flat" cmpd="sng" algn="ctr">
-                      <a:solidFill>
-                        <a:schemeClr val="tx1"/>
-                      </a:solidFill>
-                      <a:prstDash val="solid"/>
-                      <a:round/>
-                      <a:headEnd type="none" w="med" len="med"/>
-                      <a:tailEnd type="none" w="med" len="med"/>
-                    </a:lnL>
-                    <a:lnR w="12700" cap="flat" cmpd="sng" algn="ctr">
-                      <a:solidFill>
-                        <a:schemeClr val="tx1"/>
-                      </a:solidFill>
-                      <a:prstDash val="solid"/>
-                      <a:round/>
-                      <a:headEnd type="none" w="med" len="med"/>
-                      <a:tailEnd type="none" w="med" len="med"/>
-                    </a:lnR>
-                    <a:lnT w="12700" cap="flat" cmpd="sng" algn="ctr">
-                      <a:solidFill>
-                        <a:schemeClr val="tx1"/>
-                      </a:solidFill>
-                      <a:prstDash val="solid"/>
-                      <a:round/>
-                      <a:headEnd type="none" w="med" len="med"/>
-                      <a:tailEnd type="none" w="med" len="med"/>
-                    </a:lnT>
-                    <a:lnB w="12700" cap="flat" cmpd="sng" algn="ctr">
-                      <a:solidFill>
-                        <a:schemeClr val="tx1"/>
-                      </a:solidFill>
-                      <a:prstDash val="solid"/>
-                      <a:round/>
-                      <a:headEnd type="none" w="med" len="med"/>
-                      <a:tailEnd type="none" w="med" len="med"/>
-                    </a:lnB>
-                    <a:noFill/>
-                  </a:tcPr>
-                </a:tc>
-                <a:tc>
-                  <a:txBody>
-                    <a:bodyPr/>
-                    <a:lstStyle/>
-                    <a:p>
                       <a:endParaRPr lang="ru-RU" sz="1100" b="1" dirty="0">
-                        <a:solidFill>
-                          <a:schemeClr val="tx1"/>
-                        </a:solidFill>
-                        <a:effectLst>
-                          <a:outerShdw blurRad="38100" dist="38100" dir="2700000" algn="tl">
-                            <a:srgbClr val="000000">
-                              <a:alpha val="43137"/>
-                            </a:srgbClr>
-                          </a:outerShdw>
-                        </a:effectLst>
-                        <a:latin typeface="Aptos Display" panose="020B0004020202020204" pitchFamily="34" charset="0"/>
-                      </a:endParaRPr>
-                    </a:p>
-                  </a:txBody>
-                  <a:tcPr>
-                    <a:lnL w="12700" cap="flat" cmpd="sng" algn="ctr">
-                      <a:solidFill>
-                        <a:schemeClr val="tx1"/>
-                      </a:solidFill>
-                      <a:prstDash val="solid"/>
-                      <a:round/>
-                      <a:headEnd type="none" w="med" len="med"/>
-                      <a:tailEnd type="none" w="med" len="med"/>
-                    </a:lnL>
-                    <a:lnR w="12700" cap="flat" cmpd="sng" algn="ctr">
-                      <a:solidFill>
-                        <a:schemeClr val="tx1"/>
-                      </a:solidFill>
-                      <a:prstDash val="solid"/>
-                      <a:round/>
-                      <a:headEnd type="none" w="med" len="med"/>
-                      <a:tailEnd type="none" w="med" len="med"/>
-                    </a:lnR>
-                    <a:lnT w="12700" cap="flat" cmpd="sng" algn="ctr">
-                      <a:solidFill>
-                        <a:schemeClr val="tx1"/>
-                      </a:solidFill>
-                      <a:prstDash val="solid"/>
-                      <a:round/>
-                      <a:headEnd type="none" w="med" len="med"/>
-                      <a:tailEnd type="none" w="med" len="med"/>
-                    </a:lnT>
-                    <a:lnB w="12700" cap="flat" cmpd="sng" algn="ctr">
-                      <a:solidFill>
-                        <a:schemeClr val="tx1"/>
-                      </a:solidFill>
-                      <a:prstDash val="solid"/>
-                      <a:round/>
-                      <a:headEnd type="none" w="med" len="med"/>
-                      <a:tailEnd type="none" w="med" len="med"/>
-                    </a:lnB>
-                    <a:noFill/>
-                  </a:tcPr>
-                </a:tc>
-                <a:tc>
-                  <a:txBody>
-                    <a:bodyPr/>
-                    <a:lstStyle/>
-                    <a:p>
-                      <a:endParaRPr lang="ru-RU" sz="1100" b="1">
-                        <a:solidFill>
-                          <a:schemeClr val="tx1"/>
-                        </a:solidFill>
-                        <a:effectLst>
-                          <a:outerShdw blurRad="38100" dist="38100" dir="2700000" algn="tl">
-                            <a:srgbClr val="000000">
-                              <a:alpha val="43137"/>
-                            </a:srgbClr>
-                          </a:outerShdw>
-                        </a:effectLst>
-                        <a:latin typeface="Aptos Display" panose="020B0004020202020204" pitchFamily="34" charset="0"/>
-                      </a:endParaRPr>
-                    </a:p>
-                  </a:txBody>
-                  <a:tcPr>
-                    <a:lnL w="12700" cap="flat" cmpd="sng" algn="ctr">
-                      <a:solidFill>
-                        <a:schemeClr val="tx1"/>
-                      </a:solidFill>
-                      <a:prstDash val="solid"/>
-                      <a:round/>
-                      <a:headEnd type="none" w="med" len="med"/>
-                      <a:tailEnd type="none" w="med" len="med"/>
-                    </a:lnL>
-                    <a:lnR w="12700" cap="flat" cmpd="sng" algn="ctr">
-                      <a:solidFill>
-                        <a:schemeClr val="tx1"/>
-                      </a:solidFill>
-                      <a:prstDash val="solid"/>
-                      <a:round/>
-                      <a:headEnd type="none" w="med" len="med"/>
-                      <a:tailEnd type="none" w="med" len="med"/>
-                    </a:lnR>
-                    <a:lnT w="12700" cap="flat" cmpd="sng" algn="ctr">
-                      <a:solidFill>
-                        <a:schemeClr val="tx1"/>
-                      </a:solidFill>
-                      <a:prstDash val="solid"/>
-                      <a:round/>
-                      <a:headEnd type="none" w="med" len="med"/>
-                      <a:tailEnd type="none" w="med" len="med"/>
-                    </a:lnT>
-                    <a:lnB w="12700" cap="flat" cmpd="sng" algn="ctr">
-                      <a:solidFill>
-                        <a:schemeClr val="tx1"/>
-                      </a:solidFill>
-                      <a:prstDash val="solid"/>
-                      <a:round/>
-                      <a:headEnd type="none" w="med" len="med"/>
-                      <a:tailEnd type="none" w="med" len="med"/>
-                    </a:lnB>
-                    <a:noFill/>
-                  </a:tcPr>
-                </a:tc>
-                <a:tc>
-                  <a:txBody>
-                    <a:bodyPr/>
-                    <a:lstStyle/>
-                    <a:p>
-                      <a:endParaRPr lang="ru-RU" sz="1100" b="1">
-                        <a:solidFill>
-                          <a:schemeClr val="tx1"/>
-                        </a:solidFill>
-                        <a:effectLst>
-                          <a:outerShdw blurRad="38100" dist="38100" dir="2700000" algn="tl">
-                            <a:srgbClr val="000000">
-                              <a:alpha val="43137"/>
-                            </a:srgbClr>
-                          </a:outerShdw>
-                        </a:effectLst>
-                        <a:latin typeface="Aptos Display" panose="020B0004020202020204" pitchFamily="34" charset="0"/>
-                      </a:endParaRPr>
-                    </a:p>
-                  </a:txBody>
-                  <a:tcPr>
-                    <a:lnL w="12700" cap="flat" cmpd="sng" algn="ctr">
-                      <a:solidFill>
-                        <a:schemeClr val="tx1"/>
-                      </a:solidFill>
-                      <a:prstDash val="solid"/>
-                      <a:round/>
-                      <a:headEnd type="none" w="med" len="med"/>
-                      <a:tailEnd type="none" w="med" len="med"/>
-                    </a:lnL>
-                    <a:lnR w="12700" cap="flat" cmpd="sng" algn="ctr">
-                      <a:solidFill>
-                        <a:schemeClr val="tx1"/>
-                      </a:solidFill>
-                      <a:prstDash val="solid"/>
-                      <a:round/>
-                      <a:headEnd type="none" w="med" len="med"/>
-                      <a:tailEnd type="none" w="med" len="med"/>
-                    </a:lnR>
-                    <a:lnT w="12700" cap="flat" cmpd="sng" algn="ctr">
-                      <a:solidFill>
-                        <a:schemeClr val="tx1"/>
-                      </a:solidFill>
-                      <a:prstDash val="solid"/>
-                      <a:round/>
-                      <a:headEnd type="none" w="med" len="med"/>
-                      <a:tailEnd type="none" w="med" len="med"/>
-                    </a:lnT>
-                    <a:lnB w="12700" cap="flat" cmpd="sng" algn="ctr">
-                      <a:solidFill>
-                        <a:schemeClr val="tx1"/>
-                      </a:solidFill>
-                      <a:prstDash val="solid"/>
-                      <a:round/>
-                      <a:headEnd type="none" w="med" len="med"/>
-                      <a:tailEnd type="none" w="med" len="med"/>
-                    </a:lnB>
-                    <a:noFill/>
-                  </a:tcPr>
-                </a:tc>
-                <a:tc>
-                  <a:txBody>
-                    <a:bodyPr/>
-                    <a:lstStyle/>
-                    <a:p>
-                      <a:endParaRPr lang="ru-RU" sz="1100" b="1">
                         <a:solidFill>
                           <a:schemeClr val="tx1"/>
                         </a:solidFill>
@@ -12334,14 +13215,14 @@
           <p:nvPr>
             <p:extLst>
               <p:ext uri="{D42A27DB-BD31-4B8C-83A1-F6EECF244321}">
-                <p14:modId xmlns:p14="http://schemas.microsoft.com/office/powerpoint/2010/main" val="1617500635"/>
+                <p14:modId xmlns:p14="http://schemas.microsoft.com/office/powerpoint/2010/main" val="4164639251"/>
               </p:ext>
             </p:extLst>
           </p:nvPr>
         </p:nvGraphicFramePr>
         <p:xfrm>
-          <a:off x="0" y="5789677"/>
-          <a:ext cx="950976" cy="1778027"/>
+          <a:off x="0" y="5789676"/>
+          <a:ext cx="950976" cy="1774648"/>
         </p:xfrm>
         <a:graphic>
           <a:graphicData uri="http://schemas.openxmlformats.org/drawingml/2006/table">
@@ -12350,23 +13231,30 @@
                 <a:tableStyleId>{5C22544A-7EE6-4342-B048-85BDC9FD1C3A}</a:tableStyleId>
               </a:tblPr>
               <a:tblGrid>
-                <a:gridCol w="475488">
+                <a:gridCol w="316992">
                   <a:extLst>
                     <a:ext uri="{9D8B030D-6E8A-4147-A177-3AD203B41FA5}">
                       <a16:colId xmlns:a16="http://schemas.microsoft.com/office/drawing/2014/main" val="360842774"/>
                     </a:ext>
                   </a:extLst>
                 </a:gridCol>
-                <a:gridCol w="475488">
+                <a:gridCol w="316992">
                   <a:extLst>
                     <a:ext uri="{9D8B030D-6E8A-4147-A177-3AD203B41FA5}">
                       <a16:colId xmlns:a16="http://schemas.microsoft.com/office/drawing/2014/main" val="3903601910"/>
                     </a:ext>
                   </a:extLst>
                 </a:gridCol>
+                <a:gridCol w="316992">
+                  <a:extLst>
+                    <a:ext uri="{9D8B030D-6E8A-4147-A177-3AD203B41FA5}">
+                      <a16:colId xmlns:a16="http://schemas.microsoft.com/office/drawing/2014/main" val="850395368"/>
+                    </a:ext>
+                  </a:extLst>
+                </a:gridCol>
               </a:tblGrid>
-              <a:tr h="255700">
-                <a:tc gridSpan="2">
+              <a:tr h="260795">
+                <a:tc gridSpan="3">
                   <a:txBody>
                     <a:bodyPr/>
                     <a:lstStyle/>
@@ -12442,14 +13330,75 @@
                   </a:txBody>
                   <a:tcPr/>
                 </a:tc>
+                <a:tc hMerge="1">
+                  <a:txBody>
+                    <a:bodyPr/>
+                    <a:lstStyle/>
+                    <a:p>
+                      <a:pPr algn="ctr"/>
+                      <a:endParaRPr lang="ru-RU" sz="1100" b="1" dirty="0">
+                        <a:solidFill>
+                          <a:schemeClr val="tx1"/>
+                        </a:solidFill>
+                        <a:effectLst>
+                          <a:outerShdw blurRad="38100" dist="38100" dir="2700000" algn="tl">
+                            <a:srgbClr val="000000">
+                              <a:alpha val="43137"/>
+                            </a:srgbClr>
+                          </a:outerShdw>
+                        </a:effectLst>
+                        <a:latin typeface="Aptos Display" panose="020B0004020202020204" pitchFamily="34" charset="0"/>
+                      </a:endParaRPr>
+                    </a:p>
+                  </a:txBody>
+                  <a:tcPr anchor="ctr">
+                    <a:lnL w="12700" cap="flat" cmpd="sng" algn="ctr">
+                      <a:solidFill>
+                        <a:schemeClr val="tx1"/>
+                      </a:solidFill>
+                      <a:prstDash val="solid"/>
+                      <a:round/>
+                      <a:headEnd type="none" w="med" len="med"/>
+                      <a:tailEnd type="none" w="med" len="med"/>
+                    </a:lnL>
+                    <a:lnR w="12700" cap="flat" cmpd="sng" algn="ctr">
+                      <a:solidFill>
+                        <a:schemeClr val="tx1"/>
+                      </a:solidFill>
+                      <a:prstDash val="solid"/>
+                      <a:round/>
+                      <a:headEnd type="none" w="med" len="med"/>
+                      <a:tailEnd type="none" w="med" len="med"/>
+                    </a:lnR>
+                    <a:lnT w="12700" cap="flat" cmpd="sng" algn="ctr">
+                      <a:solidFill>
+                        <a:schemeClr val="tx1"/>
+                      </a:solidFill>
+                      <a:prstDash val="solid"/>
+                      <a:round/>
+                      <a:headEnd type="none" w="med" len="med"/>
+                      <a:tailEnd type="none" w="med" len="med"/>
+                    </a:lnT>
+                    <a:lnB w="12700" cap="flat" cmpd="sng" algn="ctr">
+                      <a:solidFill>
+                        <a:schemeClr val="tx1"/>
+                      </a:solidFill>
+                      <a:prstDash val="solid"/>
+                      <a:round/>
+                      <a:headEnd type="none" w="med" len="med"/>
+                      <a:tailEnd type="none" w="med" len="med"/>
+                    </a:lnB>
+                    <a:noFill/>
+                  </a:tcPr>
+                </a:tc>
                 <a:extLst>
                   <a:ext uri="{0D108BD9-81ED-4DB2-BD59-A6C34878D82A}">
                     <a16:rowId xmlns:a16="http://schemas.microsoft.com/office/drawing/2014/main" val="1940254193"/>
                   </a:ext>
                 </a:extLst>
               </a:tr>
-              <a:tr h="1143381">
-                <a:tc>
+              <a:tr h="742319">
+                <a:tc rowSpan="2">
                   <a:txBody>
                     <a:bodyPr/>
                     <a:lstStyle/>
@@ -12513,7 +13462,7 @@
                     <a:noFill/>
                   </a:tcPr>
                 </a:tc>
-                <a:tc>
+                <a:tc gridSpan="2">
                   <a:txBody>
                     <a:bodyPr/>
                     <a:lstStyle/>
@@ -12537,6 +13486,67 @@
                       </a:r>
                     </a:p>
                   </a:txBody>
+                  <a:tcPr anchor="ctr">
+                    <a:lnL w="12700" cap="flat" cmpd="sng" algn="ctr">
+                      <a:solidFill>
+                        <a:schemeClr val="tx1"/>
+                      </a:solidFill>
+                      <a:prstDash val="solid"/>
+                      <a:round/>
+                      <a:headEnd type="none" w="med" len="med"/>
+                      <a:tailEnd type="none" w="med" len="med"/>
+                    </a:lnL>
+                    <a:lnR w="12700" cap="flat" cmpd="sng" algn="ctr">
+                      <a:solidFill>
+                        <a:schemeClr val="tx1"/>
+                      </a:solidFill>
+                      <a:prstDash val="solid"/>
+                      <a:round/>
+                      <a:headEnd type="none" w="med" len="med"/>
+                      <a:tailEnd type="none" w="med" len="med"/>
+                    </a:lnR>
+                    <a:lnT w="12700" cap="flat" cmpd="sng" algn="ctr">
+                      <a:solidFill>
+                        <a:schemeClr val="tx1"/>
+                      </a:solidFill>
+                      <a:prstDash val="solid"/>
+                      <a:round/>
+                      <a:headEnd type="none" w="med" len="med"/>
+                      <a:tailEnd type="none" w="med" len="med"/>
+                    </a:lnT>
+                    <a:lnB w="12700" cap="flat" cmpd="sng" algn="ctr">
+                      <a:solidFill>
+                        <a:schemeClr val="tx1"/>
+                      </a:solidFill>
+                      <a:prstDash val="solid"/>
+                      <a:round/>
+                      <a:headEnd type="none" w="med" len="med"/>
+                      <a:tailEnd type="none" w="med" len="med"/>
+                    </a:lnB>
+                    <a:noFill/>
+                  </a:tcPr>
+                </a:tc>
+                <a:tc hMerge="1">
+                  <a:txBody>
+                    <a:bodyPr/>
+                    <a:lstStyle/>
+                    <a:p>
+                      <a:pPr algn="ctr"/>
+                      <a:endParaRPr lang="ru-RU" sz="1100" b="1" dirty="0">
+                        <a:solidFill>
+                          <a:schemeClr val="tx1"/>
+                        </a:solidFill>
+                        <a:effectLst>
+                          <a:outerShdw blurRad="38100" dist="38100" dir="2700000" algn="tl">
+                            <a:srgbClr val="000000">
+                              <a:alpha val="43137"/>
+                            </a:srgbClr>
+                          </a:outerShdw>
+                        </a:effectLst>
+                        <a:latin typeface="Aptos Display" panose="020B0004020202020204" pitchFamily="34" charset="0"/>
+                      </a:endParaRPr>
+                    </a:p>
+                  </a:txBody>
                   <a:tcPr vert="vert270" anchor="ctr">
                     <a:lnL w="12700" cap="flat" cmpd="sng" algn="ctr">
                       <a:solidFill>
@@ -12583,7 +13593,212 @@
                   </a:ext>
                 </a:extLst>
               </a:tr>
-              <a:tr h="375566">
+              <a:tr h="444283">
+                <a:tc vMerge="1">
+                  <a:txBody>
+                    <a:bodyPr/>
+                    <a:lstStyle/>
+                    <a:p>
+                      <a:endParaRPr lang="ru-RU"/>
+                    </a:p>
+                  </a:txBody>
+                  <a:tcPr/>
+                </a:tc>
+                <a:tc>
+                  <a:txBody>
+                    <a:bodyPr/>
+                    <a:lstStyle/>
+                    <a:p>
+                      <a:pPr algn="ctr"/>
+                      <a:r>
+                        <a:rPr lang="ru-RU" sz="1100" b="1" dirty="0">
+                          <a:solidFill>
+                            <a:schemeClr val="tx1"/>
+                          </a:solidFill>
+                          <a:effectLst>
+                            <a:outerShdw blurRad="38100" dist="38100" dir="2700000" algn="tl">
+                              <a:srgbClr val="000000">
+                                <a:alpha val="43137"/>
+                              </a:srgbClr>
+                            </a:outerShdw>
+                          </a:effectLst>
+                          <a:latin typeface="Aptos Display" panose="020B0004020202020204" pitchFamily="34" charset="0"/>
+                        </a:rPr>
+                        <a:t>л</a:t>
+                      </a:r>
+                    </a:p>
+                  </a:txBody>
+                  <a:tcPr anchor="ctr">
+                    <a:lnL w="12700" cap="flat" cmpd="sng" algn="ctr">
+                      <a:solidFill>
+                        <a:schemeClr val="tx1"/>
+                      </a:solidFill>
+                      <a:prstDash val="solid"/>
+                      <a:round/>
+                      <a:headEnd type="none" w="med" len="med"/>
+                      <a:tailEnd type="none" w="med" len="med"/>
+                    </a:lnL>
+                    <a:lnR w="12700" cap="flat" cmpd="sng" algn="ctr">
+                      <a:solidFill>
+                        <a:schemeClr val="tx1"/>
+                      </a:solidFill>
+                      <a:prstDash val="solid"/>
+                      <a:round/>
+                      <a:headEnd type="none" w="med" len="med"/>
+                      <a:tailEnd type="none" w="med" len="med"/>
+                    </a:lnR>
+                    <a:lnT w="12700" cap="flat" cmpd="sng" algn="ctr">
+                      <a:solidFill>
+                        <a:schemeClr val="tx1"/>
+                      </a:solidFill>
+                      <a:prstDash val="solid"/>
+                      <a:round/>
+                      <a:headEnd type="none" w="med" len="med"/>
+                      <a:tailEnd type="none" w="med" len="med"/>
+                    </a:lnT>
+                    <a:lnB w="12700" cap="flat" cmpd="sng" algn="ctr">
+                      <a:solidFill>
+                        <a:schemeClr val="tx1"/>
+                      </a:solidFill>
+                      <a:prstDash val="solid"/>
+                      <a:round/>
+                      <a:headEnd type="none" w="med" len="med"/>
+                      <a:tailEnd type="none" w="med" len="med"/>
+                    </a:lnB>
+                    <a:noFill/>
+                  </a:tcPr>
+                </a:tc>
+                <a:tc>
+                  <a:txBody>
+                    <a:bodyPr/>
+                    <a:lstStyle/>
+                    <a:p>
+                      <a:pPr algn="ctr"/>
+                      <a:r>
+                        <a:rPr lang="ru-RU" sz="1100" b="1" dirty="0">
+                          <a:solidFill>
+                            <a:schemeClr val="tx1"/>
+                          </a:solidFill>
+                          <a:effectLst>
+                            <a:outerShdw blurRad="38100" dist="38100" dir="2700000" algn="tl">
+                              <a:srgbClr val="000000">
+                                <a:alpha val="43137"/>
+                              </a:srgbClr>
+                            </a:outerShdw>
+                          </a:effectLst>
+                          <a:latin typeface="Aptos Display" panose="020B0004020202020204" pitchFamily="34" charset="0"/>
+                        </a:rPr>
+                        <a:t>п</a:t>
+                      </a:r>
+                    </a:p>
+                  </a:txBody>
+                  <a:tcPr anchor="ctr">
+                    <a:lnL w="12700" cap="flat" cmpd="sng" algn="ctr">
+                      <a:solidFill>
+                        <a:schemeClr val="tx1"/>
+                      </a:solidFill>
+                      <a:prstDash val="solid"/>
+                      <a:round/>
+                      <a:headEnd type="none" w="med" len="med"/>
+                      <a:tailEnd type="none" w="med" len="med"/>
+                    </a:lnL>
+                    <a:lnR w="12700" cap="flat" cmpd="sng" algn="ctr">
+                      <a:solidFill>
+                        <a:schemeClr val="tx1"/>
+                      </a:solidFill>
+                      <a:prstDash val="solid"/>
+                      <a:round/>
+                      <a:headEnd type="none" w="med" len="med"/>
+                      <a:tailEnd type="none" w="med" len="med"/>
+                    </a:lnR>
+                    <a:lnT w="12700" cap="flat" cmpd="sng" algn="ctr">
+                      <a:solidFill>
+                        <a:schemeClr val="tx1"/>
+                      </a:solidFill>
+                      <a:prstDash val="solid"/>
+                      <a:round/>
+                      <a:headEnd type="none" w="med" len="med"/>
+                      <a:tailEnd type="none" w="med" len="med"/>
+                    </a:lnT>
+                    <a:lnB w="12700" cap="flat" cmpd="sng" algn="ctr">
+                      <a:solidFill>
+                        <a:schemeClr val="tx1"/>
+                      </a:solidFill>
+                      <a:prstDash val="solid"/>
+                      <a:round/>
+                      <a:headEnd type="none" w="med" len="med"/>
+                      <a:tailEnd type="none" w="med" len="med"/>
+                    </a:lnB>
+                    <a:noFill/>
+                  </a:tcPr>
+                </a:tc>
+                <a:extLst>
+                  <a:ext uri="{0D108BD9-81ED-4DB2-BD59-A6C34878D82A}">
+                    <a16:rowId xmlns:a16="http://schemas.microsoft.com/office/drawing/2014/main" val="993206585"/>
+                  </a:ext>
+                </a:extLst>
+              </a:tr>
+              <a:tr h="327251">
+                <a:tc>
+                  <a:txBody>
+                    <a:bodyPr/>
+                    <a:lstStyle/>
+                    <a:p>
+                      <a:endParaRPr lang="ru-RU" sz="1100" b="1" dirty="0">
+                        <a:solidFill>
+                          <a:schemeClr val="tx1"/>
+                        </a:solidFill>
+                        <a:effectLst>
+                          <a:outerShdw blurRad="38100" dist="38100" dir="2700000" algn="tl">
+                            <a:srgbClr val="000000">
+                              <a:alpha val="43137"/>
+                            </a:srgbClr>
+                          </a:outerShdw>
+                        </a:effectLst>
+                        <a:latin typeface="Aptos Display" panose="020B0004020202020204" pitchFamily="34" charset="0"/>
+                      </a:endParaRPr>
+                    </a:p>
+                  </a:txBody>
+                  <a:tcPr>
+                    <a:lnL w="12700" cap="flat" cmpd="sng" algn="ctr">
+                      <a:solidFill>
+                        <a:schemeClr val="tx1"/>
+                      </a:solidFill>
+                      <a:prstDash val="solid"/>
+                      <a:round/>
+                      <a:headEnd type="none" w="med" len="med"/>
+                      <a:tailEnd type="none" w="med" len="med"/>
+                    </a:lnL>
+                    <a:lnR w="12700" cap="flat" cmpd="sng" algn="ctr">
+                      <a:solidFill>
+                        <a:schemeClr val="tx1"/>
+                      </a:solidFill>
+                      <a:prstDash val="solid"/>
+                      <a:round/>
+                      <a:headEnd type="none" w="med" len="med"/>
+                      <a:tailEnd type="none" w="med" len="med"/>
+                    </a:lnR>
+                    <a:lnT w="12700" cap="flat" cmpd="sng" algn="ctr">
+                      <a:solidFill>
+                        <a:schemeClr val="tx1"/>
+                      </a:solidFill>
+                      <a:prstDash val="solid"/>
+                      <a:round/>
+                      <a:headEnd type="none" w="med" len="med"/>
+                      <a:tailEnd type="none" w="med" len="med"/>
+                    </a:lnT>
+                    <a:lnB w="12700" cap="flat" cmpd="sng" algn="ctr">
+                      <a:solidFill>
+                        <a:schemeClr val="tx1"/>
+                      </a:solidFill>
+                      <a:prstDash val="solid"/>
+                      <a:round/>
+                      <a:headEnd type="none" w="med" len="med"/>
+                      <a:tailEnd type="none" w="med" len="med"/>
+                    </a:lnB>
+                    <a:noFill/>
+                  </a:tcPr>
+                </a:tc>
                 <a:tc>
                   <a:txBody>
                     <a:bodyPr/>
@@ -13045,7 +14260,7 @@
           <p:nvPr>
             <p:extLst>
               <p:ext uri="{D42A27DB-BD31-4B8C-83A1-F6EECF244321}">
-                <p14:modId xmlns:p14="http://schemas.microsoft.com/office/powerpoint/2010/main" val="582233042"/>
+                <p14:modId xmlns:p14="http://schemas.microsoft.com/office/powerpoint/2010/main" val="2171002239"/>
               </p:ext>
             </p:extLst>
           </p:nvPr>
@@ -13432,19 +14647,22 @@
                     <a:bodyPr/>
                     <a:lstStyle/>
                     <a:p>
-                      <a:endParaRPr lang="ru-RU" sz="1100" b="1" dirty="0">
-                        <a:solidFill>
-                          <a:schemeClr val="tx1"/>
-                        </a:solidFill>
-                        <a:effectLst>
-                          <a:outerShdw blurRad="38100" dist="38100" dir="2700000" algn="tl">
-                            <a:srgbClr val="000000">
-                              <a:alpha val="43137"/>
-                            </a:srgbClr>
-                          </a:outerShdw>
-                        </a:effectLst>
-                        <a:latin typeface="Aptos Narrow" panose="020B0004020202020204" pitchFamily="34" charset="0"/>
-                      </a:endParaRPr>
+                      <a:r>
+                        <a:rPr lang="ru-RU" sz="1100" b="1" dirty="0">
+                          <a:solidFill>
+                            <a:schemeClr val="tx1"/>
+                          </a:solidFill>
+                          <a:effectLst>
+                            <a:outerShdw blurRad="38100" dist="38100" dir="2700000" algn="tl">
+                              <a:srgbClr val="000000">
+                                <a:alpha val="43137"/>
+                              </a:srgbClr>
+                            </a:outerShdw>
+                          </a:effectLst>
+                          <a:latin typeface="Aptos Narrow" panose="020B0004020202020204" pitchFamily="34" charset="0"/>
+                        </a:rPr>
+                        <a:t>1.</a:t>
+                      </a:r>
                     </a:p>
                   </a:txBody>
                   <a:tcPr>
@@ -13868,19 +15086,22 @@
                     <a:bodyPr/>
                     <a:lstStyle/>
                     <a:p>
-                      <a:endParaRPr lang="ru-RU" sz="1100" b="1" dirty="0">
-                        <a:solidFill>
-                          <a:schemeClr val="tx1"/>
-                        </a:solidFill>
-                        <a:effectLst>
-                          <a:outerShdw blurRad="38100" dist="38100" dir="2700000" algn="tl">
-                            <a:srgbClr val="000000">
-                              <a:alpha val="43137"/>
-                            </a:srgbClr>
-                          </a:outerShdw>
-                        </a:effectLst>
-                        <a:latin typeface="Aptos Narrow" panose="020B0004020202020204" pitchFamily="34" charset="0"/>
-                      </a:endParaRPr>
+                      <a:r>
+                        <a:rPr lang="ru-RU" sz="1100" b="1" dirty="0">
+                          <a:solidFill>
+                            <a:schemeClr val="tx1"/>
+                          </a:solidFill>
+                          <a:effectLst>
+                            <a:outerShdw blurRad="38100" dist="38100" dir="2700000" algn="tl">
+                              <a:srgbClr val="000000">
+                                <a:alpha val="43137"/>
+                              </a:srgbClr>
+                            </a:outerShdw>
+                          </a:effectLst>
+                          <a:latin typeface="Aptos Narrow" panose="020B0004020202020204" pitchFamily="34" charset="0"/>
+                        </a:rPr>
+                        <a:t>2.</a:t>
+                      </a:r>
                     </a:p>
                   </a:txBody>
                   <a:tcPr anchor="ctr">
@@ -13948,7 +15169,7 @@
           <p:nvPr>
             <p:extLst>
               <p:ext uri="{D42A27DB-BD31-4B8C-83A1-F6EECF244321}">
-                <p14:modId xmlns:p14="http://schemas.microsoft.com/office/powerpoint/2010/main" val="2173219816"/>
+                <p14:modId xmlns:p14="http://schemas.microsoft.com/office/powerpoint/2010/main" val="3067715455"/>
               </p:ext>
             </p:extLst>
           </p:nvPr>
